--- a/SimReal-BP-v26.pptx
+++ b/SimReal-BP-v26.pptx
@@ -8699,8 +8699,8 @@
         </p:blipFill>
         <p:spPr>
           <a:xfrm>
-            <a:off x="5713804" y="4933941"/>
-            <a:ext cx="761343" cy="373397"/>
+            <a:off x="5542502" y="4849927"/>
+            <a:ext cx="1103947" cy="541425"/>
           </a:xfrm>
           <a:prstGeom prst="rect">
             <a:avLst/>
@@ -9186,55 +9186,6 @@
       <p:sp>
         <p:nvSpPr>
           <p:cNvPr id="5007" name="SimReal 5007"/>
-          <p:cNvSpPr txBox="1"/>
-          <p:nvPr/>
-        </p:nvSpPr>
-        <p:spPr>
-          <a:xfrm>
-            <a:off x="548640" y="2688336"/>
-            <a:ext cx="2567178" cy="237744"/>
-          </a:xfrm>
-          <a:prstGeom prst="rect">
-            <a:avLst/>
-          </a:prstGeom>
-          <a:noFill/>
-          <a:ln>
-            <a:noFill/>
-          </a:ln>
-        </p:spPr>
-        <p:txBody>
-          <a:bodyPr spcFirstLastPara="1" wrap="square" lIns="0" tIns="0" rIns="0" bIns="0" anchor="t" anchorCtr="0">
-            <a:noAutofit/>
-          </a:bodyPr>
-          <a:lstStyle/>
-          <a:p>
-            <a:pPr marL="0" marR="0" lvl="0" indent="0" algn="l" rtl="0">
-              <a:spcBef>
-                <a:spcPts val="0"/>
-              </a:spcBef>
-              <a:spcAft>
-                <a:spcPts val="0"/>
-              </a:spcAft>
-              <a:buNone/>
-            </a:pPr>
-            <a:r>
-              <a:rPr lang="zh-CN" sz="1000" b="0" i="0" u="none" strike="noStrike" cap="none">
-                <a:solidFill>
-                  <a:srgbClr val="6E6C66"/>
-                </a:solidFill>
-                <a:latin typeface="Instrument Sans"/>
-                <a:ea typeface="Instrument Sans"/>
-                <a:cs typeface="Instrument Sans"/>
-                <a:sym typeface="Instrument Sans"/>
-              </a:rPr>
-              <a:t>尚处采购洽谈阶段</a:t>
-            </a:r>
-          </a:p>
-        </p:txBody>
-      </p:sp>
-      <p:sp>
-        <p:nvSpPr>
-          <p:cNvPr id="5008" name="SimReal 5008"/>
           <p:cNvSpPr/>
           <p:nvPr/>
         </p:nvSpPr>
@@ -9263,7 +9214,7 @@
       </p:sp>
       <p:sp>
         <p:nvSpPr>
-          <p:cNvPr id="5009" name="SimReal 5009"/>
+          <p:cNvPr id="5008" name="SimReal 5008"/>
           <p:cNvSpPr txBox="1"/>
           <p:nvPr/>
         </p:nvSpPr>
@@ -9312,7 +9263,7 @@
       </p:sp>
       <p:sp>
         <p:nvSpPr>
-          <p:cNvPr id="5010" name="SimReal 5010"/>
+          <p:cNvPr id="5009" name="SimReal 5009"/>
           <p:cNvSpPr txBox="1"/>
           <p:nvPr/>
         </p:nvSpPr>
@@ -9354,63 +9305,14 @@
                 <a:cs typeface="Instrument Sans"/>
                 <a:sym typeface="Instrument Sans"/>
               </a:rPr>
-              <a:t>专家候补</a:t>
-            </a:r>
-          </a:p>
-        </p:txBody>
-      </p:sp>
-      <p:sp>
-        <p:nvSpPr>
-          <p:cNvPr id="5011" name="SimReal 5011"/>
-          <p:cNvSpPr txBox="1"/>
-          <p:nvPr/>
-        </p:nvSpPr>
-        <p:spPr>
-          <a:xfrm>
-            <a:off x="3390138" y="2688336"/>
-            <a:ext cx="2567178" cy="237744"/>
-          </a:xfrm>
-          <a:prstGeom prst="rect">
-            <a:avLst/>
-          </a:prstGeom>
-          <a:noFill/>
-          <a:ln>
-            <a:noFill/>
-          </a:ln>
-        </p:spPr>
-        <p:txBody>
-          <a:bodyPr spcFirstLastPara="1" wrap="square" lIns="0" tIns="0" rIns="0" bIns="0" anchor="t" anchorCtr="0">
-            <a:noAutofit/>
-          </a:bodyPr>
-          <a:lstStyle/>
-          <a:p>
-            <a:pPr marL="0" marR="0" lvl="0" indent="0" algn="l" rtl="0">
-              <a:spcBef>
-                <a:spcPts val="0"/>
-              </a:spcBef>
-              <a:spcAft>
-                <a:spcPts val="0"/>
-              </a:spcAft>
-              <a:buNone/>
-            </a:pPr>
-            <a:r>
-              <a:rPr lang="zh-CN" sz="1000" b="0" i="0" u="none" strike="noStrike" cap="none">
-                <a:solidFill>
-                  <a:srgbClr val="6E6C66"/>
-                </a:solidFill>
-                <a:latin typeface="Instrument Sans"/>
-                <a:ea typeface="Instrument Sans"/>
-                <a:cs typeface="Instrument Sans"/>
-                <a:sym typeface="Instrument Sans"/>
-              </a:rPr>
-              <a:t>非已参与交付人数</a:t>
-            </a:r>
-          </a:p>
-        </p:txBody>
-      </p:sp>
-      <p:sp>
-        <p:nvSpPr>
-          <p:cNvPr id="5012" name="SimReal 5012"/>
+              <a:t>专家候补名单</a:t>
+            </a:r>
+          </a:p>
+        </p:txBody>
+      </p:sp>
+      <p:sp>
+        <p:nvSpPr>
+          <p:cNvPr id="5010" name="SimReal 5010"/>
           <p:cNvSpPr/>
           <p:nvPr/>
         </p:nvSpPr>
@@ -9439,7 +9341,7 @@
       </p:sp>
       <p:sp>
         <p:nvSpPr>
-          <p:cNvPr id="5013" name="SimReal 5013"/>
+          <p:cNvPr id="5011" name="SimReal 5011"/>
           <p:cNvSpPr txBox="1"/>
           <p:nvPr/>
         </p:nvSpPr>
@@ -9488,7 +9390,7 @@
       </p:sp>
       <p:sp>
         <p:nvSpPr>
-          <p:cNvPr id="5014" name="SimReal 5014"/>
+          <p:cNvPr id="5012" name="SimReal 5012"/>
           <p:cNvSpPr txBox="1"/>
           <p:nvPr/>
         </p:nvSpPr>
@@ -9537,7 +9439,7 @@
       </p:sp>
       <p:sp>
         <p:nvSpPr>
-          <p:cNvPr id="5015" name="SimReal 5015"/>
+          <p:cNvPr id="5013" name="SimReal 5013"/>
           <p:cNvSpPr txBox="1"/>
           <p:nvPr/>
         </p:nvSpPr>
@@ -9586,7 +9488,7 @@
       </p:sp>
       <p:sp>
         <p:nvSpPr>
-          <p:cNvPr id="5016" name="SimReal 5016"/>
+          <p:cNvPr id="5014" name="SimReal 5014"/>
           <p:cNvSpPr/>
           <p:nvPr/>
         </p:nvSpPr>
@@ -9615,7 +9517,7 @@
       </p:sp>
       <p:sp>
         <p:nvSpPr>
-          <p:cNvPr id="5017" name="SimReal 5017"/>
+          <p:cNvPr id="5015" name="SimReal 5015"/>
           <p:cNvSpPr txBox="1"/>
           <p:nvPr/>
         </p:nvSpPr>
@@ -9664,7 +9566,7 @@
       </p:sp>
       <p:sp>
         <p:nvSpPr>
-          <p:cNvPr id="5018" name="SimReal 5018"/>
+          <p:cNvPr id="5016" name="SimReal 5016"/>
           <p:cNvSpPr txBox="1"/>
           <p:nvPr/>
         </p:nvSpPr>
@@ -9713,56 +9615,7 @@
       </p:sp>
       <p:sp>
         <p:nvSpPr>
-          <p:cNvPr id="5019" name="SimReal 5019"/>
-          <p:cNvSpPr txBox="1"/>
-          <p:nvPr/>
-        </p:nvSpPr>
-        <p:spPr>
-          <a:xfrm>
-            <a:off x="9073134" y="2688336"/>
-            <a:ext cx="2567178" cy="237744"/>
-          </a:xfrm>
-          <a:prstGeom prst="rect">
-            <a:avLst/>
-          </a:prstGeom>
-          <a:noFill/>
-          <a:ln>
-            <a:noFill/>
-          </a:ln>
-        </p:spPr>
-        <p:txBody>
-          <a:bodyPr spcFirstLastPara="1" wrap="square" lIns="0" tIns="0" rIns="0" bIns="0" anchor="t" anchorCtr="0">
-            <a:noAutofit/>
-          </a:bodyPr>
-          <a:lstStyle/>
-          <a:p>
-            <a:pPr marL="0" marR="0" lvl="0" indent="0" algn="l" rtl="0">
-              <a:spcBef>
-                <a:spcPts val="0"/>
-              </a:spcBef>
-              <a:spcAft>
-                <a:spcPts val="0"/>
-              </a:spcAft>
-              <a:buNone/>
-            </a:pPr>
-            <a:r>
-              <a:rPr lang="zh-CN" sz="1000" b="0" i="0" u="none" strike="noStrike" cap="none">
-                <a:solidFill>
-                  <a:srgbClr val="6E6C66"/>
-                </a:solidFill>
-                <a:latin typeface="Instrument Sans"/>
-                <a:ea typeface="Instrument Sans"/>
-                <a:cs typeface="Instrument Sans"/>
-                <a:sym typeface="Instrument Sans"/>
-              </a:rPr>
-              <a:t>处于交流阶段</a:t>
-            </a:r>
-          </a:p>
-        </p:txBody>
-      </p:sp>
-      <p:sp>
-        <p:nvSpPr>
-          <p:cNvPr id="5020" name="SimReal 5020"/>
+          <p:cNvPr id="5017" name="SimReal 5017"/>
           <p:cNvSpPr txBox="1"/>
           <p:nvPr/>
         </p:nvSpPr>
@@ -9811,7 +9664,7 @@
       </p:sp>
       <p:sp>
         <p:nvSpPr>
-          <p:cNvPr id="5021" name="SimReal 5021"/>
+          <p:cNvPr id="5018" name="SimReal 5018"/>
           <p:cNvSpPr/>
           <p:nvPr/>
         </p:nvSpPr>
@@ -9840,7 +9693,7 @@
       </p:sp>
       <p:sp>
         <p:nvSpPr>
-          <p:cNvPr id="5022" name="SimReal 5022"/>
+          <p:cNvPr id="5019" name="SimReal 5019"/>
           <p:cNvSpPr/>
           <p:nvPr/>
         </p:nvSpPr>
@@ -9869,7 +9722,7 @@
       </p:sp>
       <p:sp>
         <p:nvSpPr>
-          <p:cNvPr id="5023" name="SimReal 5023"/>
+          <p:cNvPr id="5020" name="SimReal 5020"/>
           <p:cNvSpPr/>
           <p:nvPr/>
         </p:nvSpPr>
@@ -9898,7 +9751,7 @@
       </p:sp>
       <p:sp>
         <p:nvSpPr>
-          <p:cNvPr id="5024" name="SimReal 5024"/>
+          <p:cNvPr id="5021" name="SimReal 5021"/>
           <p:cNvSpPr txBox="1"/>
           <p:nvPr/>
         </p:nvSpPr>
@@ -9947,7 +9800,7 @@
       </p:sp>
       <p:sp>
         <p:nvSpPr>
-          <p:cNvPr id="5025" name="SimReal 5025"/>
+          <p:cNvPr id="5022" name="SimReal 5022"/>
           <p:cNvSpPr/>
           <p:nvPr/>
         </p:nvSpPr>
@@ -9976,7 +9829,7 @@
       </p:sp>
       <p:sp>
         <p:nvSpPr>
-          <p:cNvPr id="5026" name="SimReal 5026"/>
+          <p:cNvPr id="5023" name="SimReal 5023"/>
           <p:cNvSpPr txBox="1"/>
           <p:nvPr/>
         </p:nvSpPr>
@@ -10025,7 +9878,7 @@
       </p:sp>
       <p:sp>
         <p:nvSpPr>
-          <p:cNvPr id="5027" name="SimReal 5027"/>
+          <p:cNvPr id="5024" name="SimReal 5024"/>
           <p:cNvSpPr txBox="1"/>
           <p:nvPr/>
         </p:nvSpPr>
@@ -10074,7 +9927,7 @@
       </p:sp>
       <p:sp>
         <p:nvSpPr>
-          <p:cNvPr id="5028" name="SimReal 5028"/>
+          <p:cNvPr id="5025" name="SimReal 5025"/>
           <p:cNvSpPr/>
           <p:nvPr/>
         </p:nvSpPr>
@@ -10103,7 +9956,7 @@
       </p:sp>
       <p:sp>
         <p:nvSpPr>
-          <p:cNvPr id="5029" name="SimReal 5029"/>
+          <p:cNvPr id="5026" name="SimReal 5026"/>
           <p:cNvSpPr txBox="1"/>
           <p:nvPr/>
         </p:nvSpPr>
@@ -10152,7 +10005,7 @@
       </p:sp>
       <p:sp>
         <p:nvSpPr>
-          <p:cNvPr id="5030" name="SimReal 5030"/>
+          <p:cNvPr id="5027" name="SimReal 5027"/>
           <p:cNvSpPr/>
           <p:nvPr/>
         </p:nvSpPr>
@@ -10181,7 +10034,7 @@
       </p:sp>
       <p:sp>
         <p:nvSpPr>
-          <p:cNvPr id="5031" name="SimReal 5031"/>
+          <p:cNvPr id="5028" name="SimReal 5028"/>
           <p:cNvSpPr txBox="1"/>
           <p:nvPr/>
         </p:nvSpPr>
@@ -10230,7 +10083,7 @@
       </p:sp>
       <p:sp>
         <p:nvSpPr>
-          <p:cNvPr id="5032" name="SimReal 5032"/>
+          <p:cNvPr id="5029" name="SimReal 5029"/>
           <p:cNvSpPr txBox="1"/>
           <p:nvPr/>
         </p:nvSpPr>
@@ -10279,7 +10132,7 @@
       </p:sp>
       <p:sp>
         <p:nvSpPr>
-          <p:cNvPr id="5033" name="SimReal 5033"/>
+          <p:cNvPr id="5030" name="SimReal 5030"/>
           <p:cNvSpPr txBox="1"/>
           <p:nvPr/>
         </p:nvSpPr>
@@ -10328,7 +10181,7 @@
       </p:sp>
       <p:sp>
         <p:nvSpPr>
-          <p:cNvPr id="5034" name="SimReal 5034"/>
+          <p:cNvPr id="5031" name="SimReal 5031"/>
           <p:cNvSpPr txBox="1"/>
           <p:nvPr/>
         </p:nvSpPr>
@@ -10377,7 +10230,7 @@
       </p:sp>
       <p:sp>
         <p:nvSpPr>
-          <p:cNvPr id="5035" name="SimReal 5035"/>
+          <p:cNvPr id="5032" name="SimReal 5032"/>
           <p:cNvSpPr txBox="1"/>
           <p:nvPr/>
         </p:nvSpPr>
@@ -10426,7 +10279,7 @@
       </p:sp>
       <p:sp>
         <p:nvSpPr>
-          <p:cNvPr id="5036" name="SimReal 5036"/>
+          <p:cNvPr id="5033" name="SimReal 5033"/>
           <p:cNvSpPr txBox="1"/>
           <p:nvPr/>
         </p:nvSpPr>
@@ -10475,7 +10328,7 @@
       </p:sp>
       <p:sp>
         <p:nvSpPr>
-          <p:cNvPr id="5037" name="SimReal 5037"/>
+          <p:cNvPr id="5034" name="SimReal 5034"/>
           <p:cNvSpPr txBox="1"/>
           <p:nvPr/>
         </p:nvSpPr>
@@ -11180,68 +11033,104 @@
                 <a:cs typeface="Newsreader"/>
                 <a:sym typeface="Newsreader"/>
               </a:rPr>
-              <a:t>20万+可触达、可验证的专家，来自</a:t>
+              <a:t>20万</a:t>
             </a:r>
             <a:r>
               <a:rPr lang="zh-CN" sz="2800" b="0" i="0" u="none" strike="noStrike" cap="none">
                 <a:solidFill>
-                  <a:srgbClr val="C2410C"/>
+                  <a:srgbClr val="111110"/>
+                </a:solidFill>
+                <a:latin typeface="Instrument Sans"/>
+                <a:ea typeface="Instrument Sans"/>
+                <a:cs typeface="Instrument Sans"/>
+                <a:sym typeface="Instrument Sans"/>
+              </a:rPr>
+              <a:t>+</a:t>
+            </a:r>
+            <a:r>
+              <a:rPr lang="zh-CN" sz="2800" b="0" i="0" u="none" strike="noStrike" cap="none">
+                <a:solidFill>
+                  <a:srgbClr val="111110"/>
                 </a:solidFill>
                 <a:latin typeface="Newsreader"/>
                 <a:ea typeface="Newsreader"/>
                 <a:cs typeface="Newsreader"/>
                 <a:sym typeface="Newsreader"/>
               </a:rPr>
-              <a:t>21所顶尖大学</a:t>
-            </a:r>
-          </a:p>
-        </p:txBody>
-      </p:sp>
-      <p:sp>
-        <p:nvSpPr>
-          <p:cNvPr id="5004" name="SimReal 5004"/>
-          <p:cNvSpPr txBox="1"/>
-          <p:nvPr/>
-        </p:nvSpPr>
-        <p:spPr>
-          <a:xfrm>
-            <a:off x="548640" y="1554480"/>
-            <a:ext cx="2011680" cy="731520"/>
-          </a:xfrm>
-          <a:prstGeom prst="rect">
-            <a:avLst/>
-          </a:prstGeom>
-          <a:noFill/>
-          <a:ln>
-            <a:noFill/>
-          </a:ln>
-        </p:spPr>
-        <p:txBody>
-          <a:bodyPr spcFirstLastPara="1" wrap="square" lIns="0" tIns="0" rIns="0" bIns="0" anchor="t" anchorCtr="0">
-            <a:noAutofit/>
-          </a:bodyPr>
-          <a:lstStyle/>
-          <a:p>
-            <a:pPr marL="0" marR="0" lvl="0" indent="0" algn="l" rtl="0">
-              <a:spcBef>
-                <a:spcPts val="0"/>
-              </a:spcBef>
-              <a:spcAft>
-                <a:spcPts val="0"/>
-              </a:spcAft>
-              <a:buNone/>
-            </a:pPr>
-            <a:r>
-              <a:rPr lang="zh-CN" sz="4000" b="0" i="0" u="none" strike="noStrike" cap="none">
-                <a:solidFill>
-                  <a:srgbClr val="111110"/>
+              <a:t>可触达、可验证的专家，来自</a:t>
+            </a:r>
+            <a:r>
+              <a:rPr lang="zh-CN" sz="2800" b="0" i="0" u="none" strike="noStrike" cap="none">
+                <a:solidFill>
+                  <a:srgbClr val="C2410C"/>
                 </a:solidFill>
                 <a:latin typeface="Newsreader"/>
                 <a:ea typeface="Newsreader"/>
                 <a:cs typeface="Newsreader"/>
                 <a:sym typeface="Newsreader"/>
               </a:rPr>
-              <a:t>20万+</a:t>
+              <a:t>21所顶尖大学</a:t>
+            </a:r>
+          </a:p>
+        </p:txBody>
+      </p:sp>
+      <p:sp>
+        <p:nvSpPr>
+          <p:cNvPr id="5004" name="SimReal 5004"/>
+          <p:cNvSpPr txBox="1"/>
+          <p:nvPr/>
+        </p:nvSpPr>
+        <p:spPr>
+          <a:xfrm>
+            <a:off x="548640" y="1554480"/>
+            <a:ext cx="2011680" cy="731520"/>
+          </a:xfrm>
+          <a:prstGeom prst="rect">
+            <a:avLst/>
+          </a:prstGeom>
+          <a:noFill/>
+          <a:ln>
+            <a:noFill/>
+          </a:ln>
+        </p:spPr>
+        <p:txBody>
+          <a:bodyPr spcFirstLastPara="1" wrap="square" lIns="0" tIns="0" rIns="0" bIns="0" anchor="t" anchorCtr="0">
+            <a:noAutofit/>
+          </a:bodyPr>
+          <a:lstStyle/>
+          <a:p>
+            <a:pPr marL="0" marR="0" lvl="0" indent="0" algn="l" rtl="0">
+              <a:spcBef>
+                <a:spcPts val="0"/>
+              </a:spcBef>
+              <a:spcAft>
+                <a:spcPts val="0"/>
+              </a:spcAft>
+              <a:buNone/>
+            </a:pPr>
+            <a:r>
+              <a:rPr lang="zh-CN" sz="4000" b="0" i="0" u="none" strike="noStrike" cap="none">
+                <a:solidFill>
+                  <a:srgbClr val="111110"/>
+                </a:solidFill>
+                <a:latin typeface="Newsreader"/>
+                <a:ea typeface="Newsreader"/>
+                <a:cs typeface="Newsreader"/>
+                <a:sym typeface="Newsreader"/>
+              </a:rPr>
+              <a:t>20万</a:t>
+            </a:r>
+            <a:r>
+              <a:rPr lang="zh-CN" sz="3400" b="0" i="0" u="none" strike="noStrike" cap="none">
+                <a:solidFill>
+                  <a:srgbClr val="111110"/>
+                </a:solidFill>
+                <a:latin typeface="Instrument Sans"/>
+                <a:ea typeface="Instrument Sans"/>
+                <a:cs typeface="Instrument Sans"/>
+                <a:sym typeface="Instrument Sans"/>
+              </a:rPr>
+              <a:t>+</a:t>
             </a:r>
           </a:p>
         </p:txBody>
@@ -12434,8 +12323,8 @@
         </p:nvSpPr>
         <p:spPr>
           <a:xfrm>
-            <a:off x="4062984" y="1847088"/>
-            <a:ext cx="274320" cy="548640"/>
+            <a:off x="3941064" y="1847088"/>
+            <a:ext cx="457200" cy="548640"/>
           </a:xfrm>
           <a:prstGeom prst="rect">
             <a:avLst/>
@@ -12483,8 +12372,8 @@
         </p:nvSpPr>
         <p:spPr>
           <a:xfrm>
-            <a:off x="7851648" y="1847088"/>
-            <a:ext cx="274320" cy="548640"/>
+            <a:off x="7790688" y="1847088"/>
+            <a:ext cx="457200" cy="548640"/>
           </a:xfrm>
           <a:prstGeom prst="rect">
             <a:avLst/>
@@ -12533,7 +12422,7 @@
         <p:spPr>
           <a:xfrm>
             <a:off x="548640" y="1481328"/>
-            <a:ext cx="3514344" cy="18288"/>
+            <a:ext cx="3392424" cy="18288"/>
           </a:xfrm>
           <a:prstGeom prst="rect">
             <a:avLst/>
@@ -12562,7 +12451,7 @@
         <p:spPr>
           <a:xfrm>
             <a:off x="548640" y="1609344"/>
-            <a:ext cx="3514344" cy="201168"/>
+            <a:ext cx="3392424" cy="201168"/>
           </a:xfrm>
           <a:prstGeom prst="rect">
             <a:avLst/>
@@ -12611,7 +12500,7 @@
         <p:spPr>
           <a:xfrm>
             <a:off x="548640" y="1865376"/>
-            <a:ext cx="3514344" cy="548640"/>
+            <a:ext cx="3392424" cy="548640"/>
           </a:xfrm>
           <a:prstGeom prst="rect">
             <a:avLst/>
@@ -12660,7 +12549,7 @@
         <p:spPr>
           <a:xfrm>
             <a:off x="548640" y="2487168"/>
-            <a:ext cx="3514344" cy="274320"/>
+            <a:ext cx="3392424" cy="274320"/>
           </a:xfrm>
           <a:prstGeom prst="rect">
             <a:avLst/>
@@ -12708,7 +12597,56 @@
         </p:nvSpPr>
         <p:spPr>
           <a:xfrm>
-            <a:off x="548640" y="2962656"/>
+            <a:off x="548640" y="2852928"/>
+            <a:ext cx="3392424" cy="201168"/>
+          </a:xfrm>
+          <a:prstGeom prst="rect">
+            <a:avLst/>
+          </a:prstGeom>
+          <a:noFill/>
+          <a:ln>
+            <a:noFill/>
+          </a:ln>
+        </p:spPr>
+        <p:txBody>
+          <a:bodyPr spcFirstLastPara="1" wrap="square" lIns="0" tIns="0" rIns="0" bIns="0" anchor="t" anchorCtr="0">
+            <a:noAutofit/>
+          </a:bodyPr>
+          <a:lstStyle/>
+          <a:p>
+            <a:pPr marL="0" marR="0" lvl="0" indent="0" algn="l" rtl="0">
+              <a:spcBef>
+                <a:spcPts val="0"/>
+              </a:spcBef>
+              <a:spcAft>
+                <a:spcPts val="0"/>
+              </a:spcAft>
+              <a:buNone/>
+            </a:pPr>
+            <a:r>
+              <a:rPr lang="zh-CN" sz="900" b="0" i="0" u="none" strike="noStrike" cap="none">
+                <a:solidFill>
+                  <a:srgbClr val="6E6C66"/>
+                </a:solidFill>
+                <a:latin typeface="Instrument Sans"/>
+                <a:ea typeface="Instrument Sans"/>
+                <a:cs typeface="Instrument Sans"/>
+                <a:sym typeface="Instrument Sans"/>
+              </a:rPr>
+              <a:t>头部三家收入（Surge为2024年，其余为年化）</a:t>
+            </a:r>
+          </a:p>
+        </p:txBody>
+      </p:sp>
+      <p:sp>
+        <p:nvSpPr>
+          <p:cNvPr id="5011" name="SimReal 5011"/>
+          <p:cNvSpPr txBox="1"/>
+          <p:nvPr/>
+        </p:nvSpPr>
+        <p:spPr>
+          <a:xfrm>
+            <a:off x="548640" y="3145536"/>
             <a:ext cx="1051560" cy="274320"/>
           </a:xfrm>
           <a:prstGeom prst="rect">
@@ -12751,14 +12689,14 @@
       </p:sp>
       <p:sp>
         <p:nvSpPr>
-          <p:cNvPr id="5011" name="SimReal 5011"/>
+          <p:cNvPr id="5012" name="SimReal 5012"/>
           <p:cNvSpPr/>
           <p:nvPr/>
         </p:nvSpPr>
         <p:spPr>
           <a:xfrm>
-            <a:off x="1600200" y="2990088"/>
-            <a:ext cx="1691640" cy="219456"/>
+            <a:off x="1600200" y="3172968"/>
+            <a:ext cx="1371600" cy="219456"/>
           </a:xfrm>
           <a:prstGeom prst="rect">
             <a:avLst/>
@@ -12780,14 +12718,14 @@
       </p:sp>
       <p:sp>
         <p:nvSpPr>
-          <p:cNvPr id="5012" name="SimReal 5012"/>
-          <p:cNvSpPr txBox="1"/>
-          <p:nvPr/>
-        </p:nvSpPr>
-        <p:spPr>
-          <a:xfrm>
-            <a:off x="3364992" y="2962656"/>
-            <a:ext cx="822960" cy="274320"/>
+          <p:cNvPr id="5013" name="SimReal 5013"/>
+          <p:cNvSpPr txBox="1"/>
+          <p:nvPr/>
+        </p:nvSpPr>
+        <p:spPr>
+          <a:xfrm>
+            <a:off x="3044952" y="3145536"/>
+            <a:ext cx="1005840" cy="274320"/>
           </a:xfrm>
           <a:prstGeom prst="rect">
             <a:avLst/>
@@ -12822,20 +12760,20 @@
                 <a:cs typeface="Instrument Sans"/>
                 <a:sym typeface="Instrument Sans"/>
               </a:rPr>
-              <a:t>$2.0B</a:t>
-            </a:r>
-          </a:p>
-        </p:txBody>
-      </p:sp>
-      <p:sp>
-        <p:nvSpPr>
-          <p:cNvPr id="5013" name="SimReal 5013"/>
-          <p:cNvSpPr txBox="1"/>
-          <p:nvPr/>
-        </p:nvSpPr>
-        <p:spPr>
-          <a:xfrm>
-            <a:off x="548640" y="3364992"/>
+              <a:t>20亿美元</a:t>
+            </a:r>
+          </a:p>
+        </p:txBody>
+      </p:sp>
+      <p:sp>
+        <p:nvSpPr>
+          <p:cNvPr id="5014" name="SimReal 5014"/>
+          <p:cNvSpPr txBox="1"/>
+          <p:nvPr/>
+        </p:nvSpPr>
+        <p:spPr>
+          <a:xfrm>
+            <a:off x="548640" y="3547872"/>
             <a:ext cx="1051560" cy="274320"/>
           </a:xfrm>
           <a:prstGeom prst="rect">
@@ -12878,14 +12816,14 @@
       </p:sp>
       <p:sp>
         <p:nvSpPr>
-          <p:cNvPr id="5014" name="SimReal 5014"/>
+          <p:cNvPr id="5015" name="SimReal 5015"/>
           <p:cNvSpPr/>
           <p:nvPr/>
         </p:nvSpPr>
         <p:spPr>
           <a:xfrm>
-            <a:off x="1600200" y="3392424"/>
-            <a:ext cx="1014984" cy="219456"/>
+            <a:off x="1600200" y="3575304"/>
+            <a:ext cx="822960" cy="219456"/>
           </a:xfrm>
           <a:prstGeom prst="rect">
             <a:avLst/>
@@ -12907,14 +12845,14 @@
       </p:sp>
       <p:sp>
         <p:nvSpPr>
-          <p:cNvPr id="5015" name="SimReal 5015"/>
-          <p:cNvSpPr txBox="1"/>
-          <p:nvPr/>
-        </p:nvSpPr>
-        <p:spPr>
-          <a:xfrm>
-            <a:off x="2688336" y="3364992"/>
-            <a:ext cx="822960" cy="274320"/>
+          <p:cNvPr id="5016" name="SimReal 5016"/>
+          <p:cNvSpPr txBox="1"/>
+          <p:nvPr/>
+        </p:nvSpPr>
+        <p:spPr>
+          <a:xfrm>
+            <a:off x="2496312" y="3547872"/>
+            <a:ext cx="1005840" cy="274320"/>
           </a:xfrm>
           <a:prstGeom prst="rect">
             <a:avLst/>
@@ -12949,20 +12887,20 @@
                 <a:cs typeface="Instrument Sans"/>
                 <a:sym typeface="Instrument Sans"/>
               </a:rPr>
-              <a:t>$1.2B</a:t>
-            </a:r>
-          </a:p>
-        </p:txBody>
-      </p:sp>
-      <p:sp>
-        <p:nvSpPr>
-          <p:cNvPr id="5016" name="SimReal 5016"/>
-          <p:cNvSpPr txBox="1"/>
-          <p:nvPr/>
-        </p:nvSpPr>
-        <p:spPr>
-          <a:xfrm>
-            <a:off x="548640" y="3767328"/>
+              <a:t>12亿美元</a:t>
+            </a:r>
+          </a:p>
+        </p:txBody>
+      </p:sp>
+      <p:sp>
+        <p:nvSpPr>
+          <p:cNvPr id="5017" name="SimReal 5017"/>
+          <p:cNvSpPr txBox="1"/>
+          <p:nvPr/>
+        </p:nvSpPr>
+        <p:spPr>
+          <a:xfrm>
+            <a:off x="548640" y="3950208"/>
             <a:ext cx="1051560" cy="274320"/>
           </a:xfrm>
           <a:prstGeom prst="rect">
@@ -13005,14 +12943,14 @@
       </p:sp>
       <p:sp>
         <p:nvSpPr>
-          <p:cNvPr id="5017" name="SimReal 5017"/>
+          <p:cNvPr id="5018" name="SimReal 5018"/>
           <p:cNvSpPr/>
           <p:nvPr/>
         </p:nvSpPr>
         <p:spPr>
           <a:xfrm>
-            <a:off x="1600200" y="3794760"/>
-            <a:ext cx="317183" cy="219456"/>
+            <a:off x="1600200" y="3977640"/>
+            <a:ext cx="257175" cy="219456"/>
           </a:xfrm>
           <a:prstGeom prst="rect">
             <a:avLst/>
@@ -13034,14 +12972,14 @@
       </p:sp>
       <p:sp>
         <p:nvSpPr>
-          <p:cNvPr id="5018" name="SimReal 5018"/>
-          <p:cNvSpPr txBox="1"/>
-          <p:nvPr/>
-        </p:nvSpPr>
-        <p:spPr>
-          <a:xfrm>
-            <a:off x="1990534" y="3767328"/>
-            <a:ext cx="822960" cy="274320"/>
+          <p:cNvPr id="5019" name="SimReal 5019"/>
+          <p:cNvSpPr txBox="1"/>
+          <p:nvPr/>
+        </p:nvSpPr>
+        <p:spPr>
+          <a:xfrm>
+            <a:off x="1930527" y="3950208"/>
+            <a:ext cx="1005840" cy="274320"/>
           </a:xfrm>
           <a:prstGeom prst="rect">
             <a:avLst/>
@@ -13076,21 +13014,21 @@
                 <a:cs typeface="Instrument Sans"/>
                 <a:sym typeface="Instrument Sans"/>
               </a:rPr>
-              <a:t>$0.375B</a:t>
-            </a:r>
-          </a:p>
-        </p:txBody>
-      </p:sp>
-      <p:sp>
-        <p:nvSpPr>
-          <p:cNvPr id="5019" name="SimReal 5019"/>
+              <a:t>3.75亿美元</a:t>
+            </a:r>
+          </a:p>
+        </p:txBody>
+      </p:sp>
+      <p:sp>
+        <p:nvSpPr>
+          <p:cNvPr id="5020" name="SimReal 5020"/>
           <p:cNvSpPr/>
           <p:nvPr/>
         </p:nvSpPr>
         <p:spPr>
           <a:xfrm>
-            <a:off x="4337304" y="1481328"/>
-            <a:ext cx="3514344" cy="18288"/>
+            <a:off x="4398264" y="1481328"/>
+            <a:ext cx="3392424" cy="18288"/>
           </a:xfrm>
           <a:prstGeom prst="rect">
             <a:avLst/>
@@ -13112,14 +13050,14 @@
       </p:sp>
       <p:sp>
         <p:nvSpPr>
-          <p:cNvPr id="5020" name="SimReal 5020"/>
-          <p:cNvSpPr txBox="1"/>
-          <p:nvPr/>
-        </p:nvSpPr>
-        <p:spPr>
-          <a:xfrm>
-            <a:off x="4337304" y="1609344"/>
-            <a:ext cx="3514344" cy="201168"/>
+          <p:cNvPr id="5021" name="SimReal 5021"/>
+          <p:cNvSpPr txBox="1"/>
+          <p:nvPr/>
+        </p:nvSpPr>
+        <p:spPr>
+          <a:xfrm>
+            <a:off x="4398264" y="1609344"/>
+            <a:ext cx="3392424" cy="201168"/>
           </a:xfrm>
           <a:prstGeom prst="rect">
             <a:avLst/>
@@ -13161,14 +13099,14 @@
       </p:sp>
       <p:sp>
         <p:nvSpPr>
-          <p:cNvPr id="5021" name="SimReal 5021"/>
-          <p:cNvSpPr txBox="1"/>
-          <p:nvPr/>
-        </p:nvSpPr>
-        <p:spPr>
-          <a:xfrm>
-            <a:off x="4337304" y="1865376"/>
-            <a:ext cx="3514344" cy="548640"/>
+          <p:cNvPr id="5022" name="SimReal 5022"/>
+          <p:cNvSpPr txBox="1"/>
+          <p:nvPr/>
+        </p:nvSpPr>
+        <p:spPr>
+          <a:xfrm>
+            <a:off x="4398264" y="1865376"/>
+            <a:ext cx="3392424" cy="548640"/>
           </a:xfrm>
           <a:prstGeom prst="rect">
             <a:avLst/>
@@ -13210,14 +13148,14 @@
       </p:sp>
       <p:sp>
         <p:nvSpPr>
-          <p:cNvPr id="5022" name="SimReal 5022"/>
-          <p:cNvSpPr txBox="1"/>
-          <p:nvPr/>
-        </p:nvSpPr>
-        <p:spPr>
-          <a:xfrm>
-            <a:off x="4337304" y="2505456"/>
-            <a:ext cx="2325624" cy="365760"/>
+          <p:cNvPr id="5023" name="SimReal 5023"/>
+          <p:cNvSpPr txBox="1"/>
+          <p:nvPr/>
+        </p:nvSpPr>
+        <p:spPr>
+          <a:xfrm>
+            <a:off x="4398264" y="2505456"/>
+            <a:ext cx="2203704" cy="365760"/>
           </a:xfrm>
           <a:prstGeom prst="rect">
             <a:avLst/>
@@ -13259,13 +13197,13 @@
       </p:sp>
       <p:sp>
         <p:nvSpPr>
-          <p:cNvPr id="5023" name="SimReal 5023"/>
-          <p:cNvSpPr txBox="1"/>
-          <p:nvPr/>
-        </p:nvSpPr>
-        <p:spPr>
-          <a:xfrm>
-            <a:off x="6662928" y="2505456"/>
+          <p:cNvPr id="5024" name="SimReal 5024"/>
+          <p:cNvSpPr txBox="1"/>
+          <p:nvPr/>
+        </p:nvSpPr>
+        <p:spPr>
+          <a:xfrm>
+            <a:off x="6601968" y="2505456"/>
             <a:ext cx="1188720" cy="365760"/>
           </a:xfrm>
           <a:prstGeom prst="rect">
@@ -13308,14 +13246,14 @@
       </p:sp>
       <p:sp>
         <p:nvSpPr>
-          <p:cNvPr id="5024" name="SimReal 5024"/>
+          <p:cNvPr id="5025" name="SimReal 5025"/>
           <p:cNvSpPr/>
           <p:nvPr/>
         </p:nvSpPr>
         <p:spPr>
           <a:xfrm>
-            <a:off x="4337304" y="2871216"/>
-            <a:ext cx="3514344" cy="9144"/>
+            <a:off x="4398264" y="2871216"/>
+            <a:ext cx="3392424" cy="9144"/>
           </a:xfrm>
           <a:prstGeom prst="rect">
             <a:avLst/>
@@ -13337,14 +13275,14 @@
       </p:sp>
       <p:sp>
         <p:nvSpPr>
-          <p:cNvPr id="5025" name="SimReal 5025"/>
-          <p:cNvSpPr txBox="1"/>
-          <p:nvPr/>
-        </p:nvSpPr>
-        <p:spPr>
-          <a:xfrm>
-            <a:off x="4337304" y="2871216"/>
-            <a:ext cx="2325624" cy="365760"/>
+          <p:cNvPr id="5026" name="SimReal 5026"/>
+          <p:cNvSpPr txBox="1"/>
+          <p:nvPr/>
+        </p:nvSpPr>
+        <p:spPr>
+          <a:xfrm>
+            <a:off x="4398264" y="2871216"/>
+            <a:ext cx="2203704" cy="365760"/>
           </a:xfrm>
           <a:prstGeom prst="rect">
             <a:avLst/>
@@ -13386,13 +13324,13 @@
       </p:sp>
       <p:sp>
         <p:nvSpPr>
-          <p:cNvPr id="5026" name="SimReal 5026"/>
-          <p:cNvSpPr txBox="1"/>
-          <p:nvPr/>
-        </p:nvSpPr>
-        <p:spPr>
-          <a:xfrm>
-            <a:off x="6662928" y="2871216"/>
+          <p:cNvPr id="5027" name="SimReal 5027"/>
+          <p:cNvSpPr txBox="1"/>
+          <p:nvPr/>
+        </p:nvSpPr>
+        <p:spPr>
+          <a:xfrm>
+            <a:off x="6601968" y="2871216"/>
             <a:ext cx="1188720" cy="365760"/>
           </a:xfrm>
           <a:prstGeom prst="rect">
@@ -13428,21 +13366,21 @@
                 <a:cs typeface="Newsreader"/>
                 <a:sym typeface="Newsreader"/>
               </a:rPr>
-              <a:t>25.6%</a:t>
-            </a:r>
-          </a:p>
-        </p:txBody>
-      </p:sp>
-      <p:sp>
-        <p:nvSpPr>
-          <p:cNvPr id="5027" name="SimReal 5027"/>
+              <a:t>25.7%</a:t>
+            </a:r>
+          </a:p>
+        </p:txBody>
+      </p:sp>
+      <p:sp>
+        <p:nvSpPr>
+          <p:cNvPr id="5028" name="SimReal 5028"/>
           <p:cNvSpPr/>
           <p:nvPr/>
         </p:nvSpPr>
         <p:spPr>
           <a:xfrm>
-            <a:off x="4337304" y="3236976"/>
-            <a:ext cx="3514344" cy="9144"/>
+            <a:off x="4398264" y="3236976"/>
+            <a:ext cx="3392424" cy="9144"/>
           </a:xfrm>
           <a:prstGeom prst="rect">
             <a:avLst/>
@@ -13464,14 +13402,14 @@
       </p:sp>
       <p:sp>
         <p:nvSpPr>
-          <p:cNvPr id="5028" name="SimReal 5028"/>
-          <p:cNvSpPr txBox="1"/>
-          <p:nvPr/>
-        </p:nvSpPr>
-        <p:spPr>
-          <a:xfrm>
-            <a:off x="4337304" y="3236976"/>
-            <a:ext cx="2325624" cy="365760"/>
+          <p:cNvPr id="5029" name="SimReal 5029"/>
+          <p:cNvSpPr txBox="1"/>
+          <p:nvPr/>
+        </p:nvSpPr>
+        <p:spPr>
+          <a:xfrm>
+            <a:off x="4398264" y="3236976"/>
+            <a:ext cx="2203704" cy="365760"/>
           </a:xfrm>
           <a:prstGeom prst="rect">
             <a:avLst/>
@@ -13513,13 +13451,13 @@
       </p:sp>
       <p:sp>
         <p:nvSpPr>
-          <p:cNvPr id="5029" name="SimReal 5029"/>
-          <p:cNvSpPr txBox="1"/>
-          <p:nvPr/>
-        </p:nvSpPr>
-        <p:spPr>
-          <a:xfrm>
-            <a:off x="6662928" y="3236976"/>
+          <p:cNvPr id="5030" name="SimReal 5030"/>
+          <p:cNvSpPr txBox="1"/>
+          <p:nvPr/>
+        </p:nvSpPr>
+        <p:spPr>
+          <a:xfrm>
+            <a:off x="6601968" y="3236976"/>
             <a:ext cx="1188720" cy="365760"/>
           </a:xfrm>
           <a:prstGeom prst="rect">
@@ -13562,14 +13500,14 @@
       </p:sp>
       <p:sp>
         <p:nvSpPr>
-          <p:cNvPr id="5030" name="SimReal 5030"/>
+          <p:cNvPr id="5031" name="SimReal 5031"/>
           <p:cNvSpPr/>
           <p:nvPr/>
         </p:nvSpPr>
         <p:spPr>
           <a:xfrm>
-            <a:off x="4337304" y="3602736"/>
-            <a:ext cx="3514344" cy="9144"/>
+            <a:off x="4398264" y="3602736"/>
+            <a:ext cx="3392424" cy="9144"/>
           </a:xfrm>
           <a:prstGeom prst="rect">
             <a:avLst/>
@@ -13591,14 +13529,14 @@
       </p:sp>
       <p:sp>
         <p:nvSpPr>
-          <p:cNvPr id="5031" name="SimReal 5031"/>
-          <p:cNvSpPr txBox="1"/>
-          <p:nvPr/>
-        </p:nvSpPr>
-        <p:spPr>
-          <a:xfrm>
-            <a:off x="4337304" y="3602736"/>
-            <a:ext cx="2325624" cy="365760"/>
+          <p:cNvPr id="5032" name="SimReal 5032"/>
+          <p:cNvSpPr txBox="1"/>
+          <p:nvPr/>
+        </p:nvSpPr>
+        <p:spPr>
+          <a:xfrm>
+            <a:off x="4398264" y="3602736"/>
+            <a:ext cx="2203704" cy="365760"/>
           </a:xfrm>
           <a:prstGeom prst="rect">
             <a:avLst/>
@@ -13624,29 +13562,29 @@
               <a:buNone/>
             </a:pPr>
             <a:r>
-              <a:rPr lang="zh-CN" sz="1100" b="0" i="0" u="none" strike="noStrike" cap="none">
-                <a:solidFill>
-                  <a:srgbClr val="33322F"/>
-                </a:solidFill>
-                <a:latin typeface="Instrument Sans"/>
-                <a:ea typeface="Instrument Sans"/>
-                <a:cs typeface="Instrument Sans"/>
-                <a:sym typeface="Instrument Sans"/>
-              </a:rPr>
-              <a:t>美国以外渗透减半</a:t>
-            </a:r>
-          </a:p>
-        </p:txBody>
-      </p:sp>
-      <p:sp>
-        <p:nvSpPr>
-          <p:cNvPr id="5032" name="SimReal 5032"/>
-          <p:cNvSpPr txBox="1"/>
-          <p:nvPr/>
-        </p:nvSpPr>
-        <p:spPr>
-          <a:xfrm>
-            <a:off x="6662928" y="3602736"/>
+              <a:rPr lang="zh-CN" sz="1100" b="1" i="0" u="none" strike="noStrike" cap="none">
+                <a:solidFill>
+                  <a:srgbClr val="111110"/>
+                </a:solidFill>
+                <a:latin typeface="Instrument Sans"/>
+                <a:ea typeface="Instrument Sans"/>
+                <a:cs typeface="Instrument Sans"/>
+                <a:sym typeface="Instrument Sans"/>
+              </a:rPr>
+              <a:t>= 美国以外渗透减半</a:t>
+            </a:r>
+          </a:p>
+        </p:txBody>
+      </p:sp>
+      <p:sp>
+        <p:nvSpPr>
+          <p:cNvPr id="5033" name="SimReal 5033"/>
+          <p:cNvSpPr txBox="1"/>
+          <p:nvPr/>
+        </p:nvSpPr>
+        <p:spPr>
+          <a:xfrm>
+            <a:off x="6601968" y="3602736"/>
             <a:ext cx="1188720" cy="365760"/>
           </a:xfrm>
           <a:prstGeom prst="rect">
@@ -13689,14 +13627,14 @@
       </p:sp>
       <p:sp>
         <p:nvSpPr>
-          <p:cNvPr id="5033" name="SimReal 5033"/>
+          <p:cNvPr id="5034" name="SimReal 5034"/>
           <p:cNvSpPr/>
           <p:nvPr/>
         </p:nvSpPr>
         <p:spPr>
           <a:xfrm>
-            <a:off x="8125968" y="1481328"/>
-            <a:ext cx="3514344" cy="3383280"/>
+            <a:off x="8247888" y="1481328"/>
+            <a:ext cx="3392424" cy="3383280"/>
           </a:xfrm>
           <a:prstGeom prst="rect">
             <a:avLst/>
@@ -13718,14 +13656,14 @@
       </p:sp>
       <p:sp>
         <p:nvSpPr>
-          <p:cNvPr id="5034" name="SimReal 5034"/>
-          <p:cNvSpPr txBox="1"/>
-          <p:nvPr/>
-        </p:nvSpPr>
-        <p:spPr>
-          <a:xfrm>
-            <a:off x="8363712" y="1609344"/>
-            <a:ext cx="3038856" cy="201168"/>
+          <p:cNvPr id="5035" name="SimReal 5035"/>
+          <p:cNvSpPr txBox="1"/>
+          <p:nvPr/>
+        </p:nvSpPr>
+        <p:spPr>
+          <a:xfrm>
+            <a:off x="8485632" y="1609344"/>
+            <a:ext cx="2916936" cy="201168"/>
           </a:xfrm>
           <a:prstGeom prst="rect">
             <a:avLst/>
@@ -13767,14 +13705,14 @@
       </p:sp>
       <p:sp>
         <p:nvSpPr>
-          <p:cNvPr id="5035" name="SimReal 5035"/>
-          <p:cNvSpPr txBox="1"/>
-          <p:nvPr/>
-        </p:nvSpPr>
-        <p:spPr>
-          <a:xfrm>
-            <a:off x="8363712" y="1865376"/>
-            <a:ext cx="3038856" cy="548640"/>
+          <p:cNvPr id="5036" name="SimReal 5036"/>
+          <p:cNvSpPr txBox="1"/>
+          <p:nvPr/>
+        </p:nvSpPr>
+        <p:spPr>
+          <a:xfrm>
+            <a:off x="8485632" y="1865376"/>
+            <a:ext cx="2916936" cy="548640"/>
           </a:xfrm>
           <a:prstGeom prst="rect">
             <a:avLst/>
@@ -13816,14 +13754,14 @@
       </p:sp>
       <p:sp>
         <p:nvSpPr>
-          <p:cNvPr id="5036" name="SimReal 5036"/>
-          <p:cNvSpPr txBox="1"/>
-          <p:nvPr/>
-        </p:nvSpPr>
-        <p:spPr>
-          <a:xfrm>
-            <a:off x="8363712" y="2505456"/>
-            <a:ext cx="1850136" cy="365760"/>
+          <p:cNvPr id="5037" name="SimReal 5037"/>
+          <p:cNvSpPr txBox="1"/>
+          <p:nvPr/>
+        </p:nvSpPr>
+        <p:spPr>
+          <a:xfrm>
+            <a:off x="8485632" y="2505456"/>
+            <a:ext cx="1728216" cy="365760"/>
           </a:xfrm>
           <a:prstGeom prst="rect">
             <a:avLst/>
@@ -13865,7 +13803,7 @@
       </p:sp>
       <p:sp>
         <p:nvSpPr>
-          <p:cNvPr id="5037" name="SimReal 5037"/>
+          <p:cNvPr id="5038" name="SimReal 5038"/>
           <p:cNvSpPr txBox="1"/>
           <p:nvPr/>
         </p:nvSpPr>
@@ -13914,14 +13852,14 @@
       </p:sp>
       <p:sp>
         <p:nvSpPr>
-          <p:cNvPr id="5038" name="SimReal 5038"/>
+          <p:cNvPr id="5039" name="SimReal 5039"/>
           <p:cNvSpPr/>
           <p:nvPr/>
         </p:nvSpPr>
         <p:spPr>
           <a:xfrm>
-            <a:off x="8363712" y="2871216"/>
-            <a:ext cx="3038856" cy="9144"/>
+            <a:off x="8485632" y="2871216"/>
+            <a:ext cx="2916936" cy="9144"/>
           </a:xfrm>
           <a:prstGeom prst="rect">
             <a:avLst/>
@@ -13943,14 +13881,14 @@
       </p:sp>
       <p:sp>
         <p:nvSpPr>
-          <p:cNvPr id="5039" name="SimReal 5039"/>
-          <p:cNvSpPr txBox="1"/>
-          <p:nvPr/>
-        </p:nvSpPr>
-        <p:spPr>
-          <a:xfrm>
-            <a:off x="8363712" y="2871216"/>
-            <a:ext cx="1850136" cy="365760"/>
+          <p:cNvPr id="5040" name="SimReal 5040"/>
+          <p:cNvSpPr txBox="1"/>
+          <p:nvPr/>
+        </p:nvSpPr>
+        <p:spPr>
+          <a:xfrm>
+            <a:off x="8485632" y="2871216"/>
+            <a:ext cx="1728216" cy="365760"/>
           </a:xfrm>
           <a:prstGeom prst="rect">
             <a:avLst/>
@@ -13992,7 +13930,7 @@
       </p:sp>
       <p:sp>
         <p:nvSpPr>
-          <p:cNvPr id="5040" name="SimReal 5040"/>
+          <p:cNvPr id="5041" name="SimReal 5041"/>
           <p:cNvSpPr txBox="1"/>
           <p:nvPr/>
         </p:nvSpPr>
@@ -14041,14 +13979,14 @@
       </p:sp>
       <p:sp>
         <p:nvSpPr>
-          <p:cNvPr id="5041" name="SimReal 5041"/>
+          <p:cNvPr id="5042" name="SimReal 5042"/>
           <p:cNvSpPr/>
           <p:nvPr/>
         </p:nvSpPr>
         <p:spPr>
           <a:xfrm>
-            <a:off x="8363712" y="3236976"/>
-            <a:ext cx="3038856" cy="9144"/>
+            <a:off x="8485632" y="3236976"/>
+            <a:ext cx="2916936" cy="9144"/>
           </a:xfrm>
           <a:prstGeom prst="rect">
             <a:avLst/>
@@ -14070,14 +14008,14 @@
       </p:sp>
       <p:sp>
         <p:nvSpPr>
-          <p:cNvPr id="5042" name="SimReal 5042"/>
-          <p:cNvSpPr txBox="1"/>
-          <p:nvPr/>
-        </p:nvSpPr>
-        <p:spPr>
-          <a:xfrm>
-            <a:off x="8363712" y="3236976"/>
-            <a:ext cx="1850136" cy="365760"/>
+          <p:cNvPr id="5043" name="SimReal 5043"/>
+          <p:cNvSpPr txBox="1"/>
+          <p:nvPr/>
+        </p:nvSpPr>
+        <p:spPr>
+          <a:xfrm>
+            <a:off x="8485632" y="3236976"/>
+            <a:ext cx="1728216" cy="365760"/>
           </a:xfrm>
           <a:prstGeom prst="rect">
             <a:avLst/>
@@ -14119,7 +14057,7 @@
       </p:sp>
       <p:sp>
         <p:nvSpPr>
-          <p:cNvPr id="5043" name="SimReal 5043"/>
+          <p:cNvPr id="5044" name="SimReal 5044"/>
           <p:cNvSpPr txBox="1"/>
           <p:nvPr/>
         </p:nvSpPr>
@@ -14168,14 +14106,14 @@
       </p:sp>
       <p:sp>
         <p:nvSpPr>
-          <p:cNvPr id="5044" name="SimReal 5044"/>
-          <p:cNvSpPr txBox="1"/>
-          <p:nvPr/>
-        </p:nvSpPr>
-        <p:spPr>
-          <a:xfrm>
-            <a:off x="8363712" y="3694176"/>
-            <a:ext cx="3038856" cy="457200"/>
+          <p:cNvPr id="5045" name="SimReal 5045"/>
+          <p:cNvSpPr txBox="1"/>
+          <p:nvPr/>
+        </p:nvSpPr>
+        <p:spPr>
+          <a:xfrm>
+            <a:off x="8485632" y="3694176"/>
+            <a:ext cx="2916936" cy="457200"/>
           </a:xfrm>
           <a:prstGeom prst="rect">
             <a:avLst/>
@@ -14217,14 +14155,14 @@
       </p:sp>
       <p:sp>
         <p:nvSpPr>
-          <p:cNvPr id="5045" name="SimReal 5045"/>
-          <p:cNvSpPr txBox="1"/>
-          <p:nvPr/>
-        </p:nvSpPr>
-        <p:spPr>
-          <a:xfrm>
-            <a:off x="8363712" y="4224528"/>
-            <a:ext cx="3038856" cy="457200"/>
+          <p:cNvPr id="5046" name="SimReal 5046"/>
+          <p:cNvSpPr txBox="1"/>
+          <p:nvPr/>
+        </p:nvSpPr>
+        <p:spPr>
+          <a:xfrm>
+            <a:off x="8485632" y="4224528"/>
+            <a:ext cx="2916936" cy="457200"/>
           </a:xfrm>
           <a:prstGeom prst="rect">
             <a:avLst/>
@@ -14269,7 +14207,7 @@
       </p:sp>
       <p:sp>
         <p:nvSpPr>
-          <p:cNvPr id="5046" name="SimReal 5046"/>
+          <p:cNvPr id="5047" name="SimReal 5047"/>
           <p:cNvSpPr txBox="1"/>
           <p:nvPr/>
         </p:nvSpPr>
@@ -14342,7 +14280,7 @@
       </p:sp>
       <p:sp>
         <p:nvSpPr>
-          <p:cNvPr id="5047" name="SimReal 5047"/>
+          <p:cNvPr id="5048" name="SimReal 5048"/>
           <p:cNvSpPr txBox="1"/>
           <p:nvPr/>
         </p:nvSpPr>
@@ -14387,14 +14325,14 @@
                 <a:cs typeface="Instrument Sans"/>
                 <a:sym typeface="Instrument Sans"/>
               </a:rPr>
-              <a:t>来源：Menlo Ventures（2026.7）；Mercor年化毛营收（2026.7）、Surge收入（2024）、Snorkel年化收入（2026.9）；麦肯锡（2025.11）；IMF（2026.4）；科技公司年报。训练占比、美国以外渗透率为假设，详见A2。</a:t>
-            </a:r>
-          </a:p>
-        </p:txBody>
-      </p:sp>
-      <p:sp>
-        <p:nvSpPr>
-          <p:cNvPr id="5048" name="SimReal 5048"/>
+              <a:t>来源：Menlo Ventures（2026.7）；Mercor年化毛营收（2026.6）、Surge收入（2024）、Snorkel年化收入（2026.9）；麦肯锡（2025.11）；IMF（2026.4）；科技公司年报。训练占比、美国以外渗透率为假设，详见A2。</a:t>
+            </a:r>
+          </a:p>
+        </p:txBody>
+      </p:sp>
+      <p:sp>
+        <p:nvSpPr>
+          <p:cNvPr id="5049" name="SimReal 5049"/>
           <p:cNvSpPr txBox="1"/>
           <p:nvPr/>
         </p:nvSpPr>
@@ -14443,7 +14381,7 @@
       </p:sp>
       <p:sp>
         <p:nvSpPr>
-          <p:cNvPr id="5049" name="SimReal 5049"/>
+          <p:cNvPr id="5050" name="SimReal 5050"/>
           <p:cNvSpPr txBox="1"/>
           <p:nvPr/>
         </p:nvSpPr>
@@ -14492,7 +14430,7 @@
       </p:sp>
       <p:sp>
         <p:nvSpPr>
-          <p:cNvPr id="5050" name="SimReal 5050"/>
+          <p:cNvPr id="5051" name="SimReal 5051"/>
           <p:cNvSpPr txBox="1"/>
           <p:nvPr/>
         </p:nvSpPr>
@@ -15246,32 +15184,6 @@
               <a:t>主要服务国内实验室：专家数据与评测</a:t>
             </a:r>
           </a:p>
-          <a:p>
-            <a:pPr marL="0" marR="0" lvl="0" indent="0" algn="l" rtl="0">
-              <a:lnSpc>
-                <a:spcPct val="110000"/>
-              </a:lnSpc>
-              <a:spcBef>
-                <a:spcPts val="419"/>
-              </a:spcBef>
-              <a:spcAft>
-                <a:spcPts val="0"/>
-              </a:spcAft>
-              <a:buNone/>
-            </a:pPr>
-            <a:r>
-              <a:rPr lang="zh-CN" sz="1200" b="0" i="0" u="none" strike="noStrike" cap="none">
-                <a:solidFill>
-                  <a:srgbClr val="33322F"/>
-                </a:solidFill>
-                <a:latin typeface="Instrument Sans"/>
-                <a:ea typeface="Instrument Sans"/>
-                <a:cs typeface="Instrument Sans"/>
-                <a:sym typeface="Instrument Sans"/>
-              </a:rPr>
-              <a:t>UniPat由阿里领投，估值25亿美元</a:t>
-            </a:r>
-          </a:p>
         </p:txBody>
       </p:sp>
       <p:sp>
@@ -16173,7 +16085,7 @@
                 <a:cs typeface="Instrument Sans"/>
                 <a:sym typeface="Instrument Sans"/>
               </a:rPr>
-              <a:t>14天7款产品：AI变得越快，我们越有利</a:t>
+              <a:t>AI每一次变化，我们第一个抓住、第一个交付</a:t>
             </a:r>
           </a:p>
         </p:txBody>
@@ -16367,7 +16279,7 @@
                 <a:cs typeface="Instrument Sans"/>
                 <a:sym typeface="Instrument Sans"/>
               </a:rPr>
-              <a:t>9月，UniPat获阿里领投3亿美元（估值25亿美元）；Humanlaya完成鼎晖领投的数亿元人民币Pre-A，红杉中国、今日资本、BAI参投；阿里、字节、DeepSeek都已向两家采购。赛道在中美同时升温。</a:t>
+              <a:t>据彭博报道，UniPat获阿里领投3亿美元（估值25亿美元）；Humanlaya完成鼎晖领投的数亿元Pre-A；阿里、字节、DeepSeek都已向两家采购。</a:t>
             </a:r>
           </a:p>
         </p:txBody>
@@ -17500,7 +17412,7 @@
                 <a:cs typeface="Newsreader"/>
                 <a:sym typeface="Newsreader"/>
               </a:rPr>
-              <a:t>$29B</a:t>
+              <a:t>290亿</a:t>
             </a:r>
           </a:p>
         </p:txBody>
@@ -17552,7 +17464,7 @@
                 <a:cs typeface="Instrument Sans"/>
                 <a:sym typeface="Instrument Sans"/>
               </a:rPr>
-              <a:t>估值，2025年</a:t>
+              <a:t>美元估值，2025年</a:t>
             </a:r>
           </a:p>
         </p:txBody>
@@ -17922,7 +17834,7 @@
                 <a:cs typeface="Newsreader"/>
                 <a:sym typeface="Newsreader"/>
               </a:rPr>
-              <a:t>$10B</a:t>
+              <a:t>100亿</a:t>
             </a:r>
           </a:p>
         </p:txBody>
@@ -17974,7 +17886,7 @@
                 <a:cs typeface="Instrument Sans"/>
                 <a:sym typeface="Instrument Sans"/>
               </a:rPr>
-              <a:t>估值，2025年</a:t>
+              <a:t>美元估值，2025年</a:t>
             </a:r>
           </a:p>
         </p:txBody>
@@ -18344,7 +18256,7 @@
                 <a:cs typeface="Newsreader"/>
                 <a:sym typeface="Newsreader"/>
               </a:rPr>
-              <a:t>$3.2B</a:t>
+              <a:t>32亿</a:t>
             </a:r>
           </a:p>
         </p:txBody>
@@ -18396,7 +18308,7 @@
                 <a:cs typeface="Instrument Sans"/>
                 <a:sym typeface="Instrument Sans"/>
               </a:rPr>
-              <a:t>加入YC 18个月</a:t>
+              <a:t>美元估值，加入YC 18个月</a:t>
             </a:r>
           </a:p>
         </p:txBody>
@@ -18925,7 +18837,7 @@
                 <a:cs typeface="Instrument Sans"/>
                 <a:sym typeface="Instrument Sans"/>
               </a:rPr>
-              <a:t>05后量化创始团队，高中同学</a:t>
+              <a:t>05后量化创始团队</a:t>
             </a:r>
           </a:p>
         </p:txBody>
@@ -20625,7 +20537,7 @@
                 <a:cs typeface="Instrument Sans"/>
                 <a:sym typeface="Instrument Sans"/>
               </a:rPr>
-              <a:t>最新估值（2026年9月）</a:t>
+              <a:t>据报道估值（2026年9月）</a:t>
             </a:r>
           </a:p>
         </p:txBody>
@@ -20677,7 +20589,7 @@
                 <a:cs typeface="Instrument Sans"/>
                 <a:sym typeface="Instrument Sans"/>
               </a:rPr>
-              <a:t>阿里领投，腾讯、HSG跟投</a:t>
+              <a:t>阿里领投，腾讯、红杉中国跟投</a:t>
             </a:r>
           </a:p>
         </p:txBody>
@@ -20853,7 +20765,7 @@
                 <a:cs typeface="Instrument Sans"/>
                 <a:sym typeface="Instrument Sans"/>
               </a:rPr>
-              <a:t>Pre-A（2026年9月）</a:t>
+              <a:t>Pre-A融资额（2026年9月）</a:t>
             </a:r>
           </a:p>
         </p:txBody>
@@ -20905,7 +20817,7 @@
                 <a:cs typeface="Instrument Sans"/>
                 <a:sym typeface="Instrument Sans"/>
               </a:rPr>
-              <a:t>鼎晖领投，红杉中国、今日资本、BAI参投</a:t>
+              <a:t>鼎晖领投，红杉中国等参投</a:t>
             </a:r>
           </a:p>
         </p:txBody>
@@ -21081,7 +20993,7 @@
                 <a:cs typeface="Instrument Sans"/>
                 <a:sym typeface="Instrument Sans"/>
               </a:rPr>
-              <a:t>种子轮投后 → 14个月后</a:t>
+              <a:t>种子轮投后 → 14个月后（洽谈中）</a:t>
             </a:r>
           </a:p>
         </p:txBody>
@@ -21410,7 +21322,7 @@
                 <a:cs typeface="Newsreader"/>
                 <a:sym typeface="Newsreader"/>
               </a:rPr>
-              <a:t>国内同赛道已获阿里、腾讯、红杉中国、鼎晖、今日资本、BAI投资：</a:t>
+              <a:t>国内同赛道已获红杉中国、鼎晖、今日资本、BAI投资，阿里、腾讯也已入局：</a:t>
             </a:r>
             <a:r>
               <a:rPr lang="zh-CN" sz="1700" b="0" i="0" u="none" strike="noStrike" cap="none">
@@ -21483,7 +21395,7 @@
                 <a:cs typeface="Instrument Sans"/>
                 <a:sym typeface="Instrument Sans"/>
               </a:rPr>
-              <a:t>估值均为投后；来源见A2。</a:t>
+              <a:t>UniPat为据报道估值，Applied Compute约30亿美元为洽谈中估值，Humanlaya为融资额；其余为投后估值。来源见A2。</a:t>
             </a:r>
           </a:p>
         </p:txBody>
@@ -22157,7 +22069,7 @@
                 <a:cs typeface="Instrument Sans"/>
                 <a:sym typeface="Instrument Sans"/>
               </a:rPr>
-              <a:t>今天就赚钱：环境一次搭建，卖给多家实验室</a:t>
+              <a:t>环境一次搭建，授权给多家实验室</a:t>
             </a:r>
           </a:p>
         </p:txBody>
@@ -22763,7 +22675,79 @@
                 <a:cs typeface="Newsreader"/>
                 <a:sym typeface="Newsreader"/>
               </a:rPr>
-              <a:t>年化收入 = 环境数 × 卖出次数 × 单价</a:t>
+              <a:t>年化收入 </a:t>
+            </a:r>
+            <a:r>
+              <a:rPr lang="zh-CN" sz="1300" b="0" i="0" u="none" strike="noStrike" cap="none">
+                <a:solidFill>
+                  <a:srgbClr val="111110"/>
+                </a:solidFill>
+                <a:latin typeface="Instrument Sans"/>
+                <a:ea typeface="Instrument Sans"/>
+                <a:cs typeface="Instrument Sans"/>
+                <a:sym typeface="Instrument Sans"/>
+              </a:rPr>
+              <a:t>=</a:t>
+            </a:r>
+            <a:r>
+              <a:rPr lang="zh-CN" sz="1300" b="0" i="0" u="none" strike="noStrike" cap="none">
+                <a:solidFill>
+                  <a:srgbClr val="111110"/>
+                </a:solidFill>
+                <a:latin typeface="Newsreader"/>
+                <a:ea typeface="Newsreader"/>
+                <a:cs typeface="Newsreader"/>
+                <a:sym typeface="Newsreader"/>
+              </a:rPr>
+              <a:t> 环境数 </a:t>
+            </a:r>
+            <a:r>
+              <a:rPr lang="zh-CN" sz="1300" b="0" i="0" u="none" strike="noStrike" cap="none">
+                <a:solidFill>
+                  <a:srgbClr val="111110"/>
+                </a:solidFill>
+                <a:latin typeface="Instrument Sans"/>
+                <a:ea typeface="Instrument Sans"/>
+                <a:cs typeface="Instrument Sans"/>
+                <a:sym typeface="Instrument Sans"/>
+              </a:rPr>
+              <a:t>×</a:t>
+            </a:r>
+            <a:r>
+              <a:rPr lang="zh-CN" sz="1300" b="0" i="0" u="none" strike="noStrike" cap="none">
+                <a:solidFill>
+                  <a:srgbClr val="111110"/>
+                </a:solidFill>
+                <a:latin typeface="Newsreader"/>
+                <a:ea typeface="Newsreader"/>
+                <a:cs typeface="Newsreader"/>
+                <a:sym typeface="Newsreader"/>
+              </a:rPr>
+              <a:t> 卖出次数 </a:t>
+            </a:r>
+            <a:r>
+              <a:rPr lang="zh-CN" sz="1300" b="0" i="0" u="none" strike="noStrike" cap="none">
+                <a:solidFill>
+                  <a:srgbClr val="111110"/>
+                </a:solidFill>
+                <a:latin typeface="Instrument Sans"/>
+                <a:ea typeface="Instrument Sans"/>
+                <a:cs typeface="Instrument Sans"/>
+                <a:sym typeface="Instrument Sans"/>
+              </a:rPr>
+              <a:t>×</a:t>
+            </a:r>
+            <a:r>
+              <a:rPr lang="zh-CN" sz="1300" b="0" i="0" u="none" strike="noStrike" cap="none">
+                <a:solidFill>
+                  <a:srgbClr val="111110"/>
+                </a:solidFill>
+                <a:latin typeface="Newsreader"/>
+                <a:ea typeface="Newsreader"/>
+                <a:cs typeface="Newsreader"/>
+                <a:sym typeface="Newsreader"/>
+              </a:rPr>
+              <a:t> 单价</a:t>
             </a:r>
           </a:p>
           <a:p>
@@ -22913,7 +22897,7 @@
                 <a:cs typeface="Newsreader"/>
                 <a:sym typeface="Newsreader"/>
               </a:rPr>
-              <a:t>首批付费试点</a:t>
+              <a:t>首个付费试点</a:t>
             </a:r>
           </a:p>
         </p:txBody>
@@ -23236,7 +23220,7 @@
                 <a:cs typeface="Newsreader"/>
                 <a:sym typeface="Newsreader"/>
               </a:rPr>
-              <a:t>7万亿美元</a:t>
+              <a:t>自我进化</a:t>
             </a:r>
           </a:p>
         </p:txBody>
@@ -23285,7 +23269,7 @@
                 <a:cs typeface="Instrument Sans"/>
                 <a:sym typeface="Instrument Sans"/>
               </a:rPr>
-              <a:t>瞄准2030年整个AI经济：每个行业，一个自己变强的AI</a:t>
+              <a:t>瞄准整个AI经济：每个行业，一个自己变强的AI</a:t>
             </a:r>
           </a:p>
         </p:txBody>
@@ -24250,67 +24234,43 @@
         </p:nvSpPr>
         <p:spPr>
           <a:xfrm>
-            <a:off x="548640" y="5541264"/>
-            <a:ext cx="11091672" cy="420624"/>
-          </a:xfrm>
-          <a:prstGeom prst="rect">
-            <a:avLst/>
-          </a:prstGeom>
-          <a:noFill/>
-          <a:ln>
-            <a:noFill/>
-          </a:ln>
-        </p:spPr>
-        <p:txBody>
-          <a:bodyPr spcFirstLastPara="1" wrap="square" lIns="0" tIns="0" rIns="0" bIns="0" anchor="ctr" anchorCtr="0">
-            <a:noAutofit/>
-          </a:bodyPr>
-          <a:lstStyle/>
-          <a:p>
-            <a:pPr marL="0" marR="0" lvl="0" indent="0" algn="ctr" rtl="0">
-              <a:spcBef>
-                <a:spcPts val="0"/>
-              </a:spcBef>
-              <a:spcAft>
-                <a:spcPts val="0"/>
-              </a:spcAft>
-              <a:buNone/>
-            </a:pPr>
-            <a:r>
-              <a:rPr lang="zh-CN" sz="1800" b="0" i="0" u="none" strike="noStrike" cap="none">
-                <a:solidFill>
-                  <a:srgbClr val="111110"/>
-                </a:solidFill>
-                <a:latin typeface="Newsreader"/>
-                <a:ea typeface="Newsreader"/>
-                <a:cs typeface="Newsreader"/>
-                <a:sym typeface="Newsreader"/>
-              </a:rPr>
-              <a:t>收入引擎今天就赚钱；</a:t>
-            </a:r>
-            <a:r>
-              <a:rPr lang="zh-CN" sz="1800" b="0" i="0" u="none" strike="noStrike" cap="none">
-                <a:solidFill>
-                  <a:srgbClr val="C2410C"/>
-                </a:solidFill>
-                <a:latin typeface="Newsreader"/>
-                <a:ea typeface="Newsreader"/>
-                <a:cs typeface="Newsreader"/>
-                <a:sym typeface="Newsreader"/>
-              </a:rPr>
-              <a:t>RSI引擎，让每个行业最强的AI都出自SimReal</a:t>
-            </a:r>
-            <a:r>
-              <a:rPr lang="zh-CN" sz="1800" b="0" i="0" u="none" strike="noStrike" cap="none">
-                <a:solidFill>
-                  <a:srgbClr val="111110"/>
-                </a:solidFill>
-                <a:latin typeface="Newsreader"/>
-                <a:ea typeface="Newsreader"/>
-                <a:cs typeface="Newsreader"/>
-                <a:sym typeface="Newsreader"/>
-              </a:rPr>
-              <a:t>。</a:t>
+            <a:off x="548640" y="5577840"/>
+            <a:ext cx="11091672" cy="201168"/>
+          </a:xfrm>
+          <a:prstGeom prst="rect">
+            <a:avLst/>
+          </a:prstGeom>
+          <a:noFill/>
+          <a:ln>
+            <a:noFill/>
+          </a:ln>
+        </p:spPr>
+        <p:txBody>
+          <a:bodyPr spcFirstLastPara="1" wrap="square" lIns="0" tIns="0" rIns="0" bIns="0" anchor="t" anchorCtr="0">
+            <a:noAutofit/>
+          </a:bodyPr>
+          <a:lstStyle/>
+          <a:p>
+            <a:pPr marL="0" marR="0" lvl="0" indent="0" algn="l" rtl="0">
+              <a:spcBef>
+                <a:spcPts val="0"/>
+              </a:spcBef>
+              <a:spcAft>
+                <a:spcPts val="0"/>
+              </a:spcAft>
+              <a:buNone/>
+            </a:pPr>
+            <a:r>
+              <a:rPr lang="zh-CN" sz="850" b="0" i="0" u="none" strike="noStrike" cap="none">
+                <a:solidFill>
+                  <a:srgbClr val="6E6C66"/>
+                </a:solidFill>
+                <a:latin typeface="Instrument Sans"/>
+                <a:ea typeface="Instrument Sans"/>
+                <a:cs typeface="Instrument Sans"/>
+                <a:sym typeface="Instrument Sans"/>
+              </a:rPr>
+              <a:t>里程碑为本轮目标。</a:t>
             </a:r>
           </a:p>
         </p:txBody>
@@ -24318,55 +24278,6 @@
       <p:sp>
         <p:nvSpPr>
           <p:cNvPr id="5055" name="SimReal 5055"/>
-          <p:cNvSpPr txBox="1"/>
-          <p:nvPr/>
-        </p:nvSpPr>
-        <p:spPr>
-          <a:xfrm>
-            <a:off x="548640" y="5989320"/>
-            <a:ext cx="11091672" cy="201168"/>
-          </a:xfrm>
-          <a:prstGeom prst="rect">
-            <a:avLst/>
-          </a:prstGeom>
-          <a:noFill/>
-          <a:ln>
-            <a:noFill/>
-          </a:ln>
-        </p:spPr>
-        <p:txBody>
-          <a:bodyPr spcFirstLastPara="1" wrap="square" lIns="0" tIns="0" rIns="0" bIns="0" anchor="t" anchorCtr="0">
-            <a:noAutofit/>
-          </a:bodyPr>
-          <a:lstStyle/>
-          <a:p>
-            <a:pPr marL="0" marR="0" lvl="0" indent="0" algn="l" rtl="0">
-              <a:spcBef>
-                <a:spcPts val="0"/>
-              </a:spcBef>
-              <a:spcAft>
-                <a:spcPts val="0"/>
-              </a:spcAft>
-              <a:buNone/>
-            </a:pPr>
-            <a:r>
-              <a:rPr lang="zh-CN" sz="850" b="0" i="0" u="none" strike="noStrike" cap="none">
-                <a:solidFill>
-                  <a:srgbClr val="6E6C66"/>
-                </a:solidFill>
-                <a:latin typeface="Instrument Sans"/>
-                <a:ea typeface="Instrument Sans"/>
-                <a:cs typeface="Instrument Sans"/>
-                <a:sym typeface="Instrument Sans"/>
-              </a:rPr>
-              <a:t>里程碑为拟定目标，执行进度以试点验收、采购与训练结果为准。</a:t>
-            </a:r>
-          </a:p>
-        </p:txBody>
-      </p:sp>
-      <p:sp>
-        <p:nvSpPr>
-          <p:cNvPr id="5056" name="SimReal 5056"/>
           <p:cNvSpPr txBox="1"/>
           <p:nvPr/>
         </p:nvSpPr>
@@ -24415,7 +24326,7 @@
       </p:sp>
       <p:sp>
         <p:nvSpPr>
-          <p:cNvPr id="5057" name="SimReal 5057"/>
+          <p:cNvPr id="5056" name="SimReal 5056"/>
           <p:cNvSpPr txBox="1"/>
           <p:nvPr/>
         </p:nvSpPr>
@@ -24464,7 +24375,7 @@
       </p:sp>
       <p:sp>
         <p:nvSpPr>
-          <p:cNvPr id="5058" name="SimReal 5058"/>
+          <p:cNvPr id="5057" name="SimReal 5057"/>
           <p:cNvSpPr txBox="1"/>
           <p:nvPr/>
         </p:nvSpPr>
@@ -25529,7 +25440,33 @@
                 <a:cs typeface="Instrument Sans"/>
                 <a:sym typeface="Instrument Sans"/>
               </a:rPr>
-              <a:t>面向AI实验室与企业，提供训练环境、专业数据与评测；独家环境让AI自我进化（RSI）</a:t>
+              <a:t>面向AI实验室与企业，提供训练环境、专业数据与评测</a:t>
+            </a:r>
+          </a:p>
+          <a:p>
+            <a:pPr marL="0" marR="0" lvl="0" indent="0" algn="l" rtl="0">
+              <a:lnSpc>
+                <a:spcPct val="114999"/>
+              </a:lnSpc>
+              <a:spcBef>
+                <a:spcPts val="0"/>
+              </a:spcBef>
+              <a:spcAft>
+                <a:spcPts val="0"/>
+              </a:spcAft>
+              <a:buNone/>
+            </a:pPr>
+            <a:r>
+              <a:rPr lang="zh-CN" sz="1100" b="0" i="0" u="none" strike="noStrike" cap="none">
+                <a:solidFill>
+                  <a:srgbClr val="33322F"/>
+                </a:solidFill>
+                <a:latin typeface="Instrument Sans"/>
+                <a:ea typeface="Instrument Sans"/>
+                <a:cs typeface="Instrument Sans"/>
+                <a:sym typeface="Instrument Sans"/>
+              </a:rPr>
+              <a:t>独家环境让AI自我进化（RSI）</a:t>
             </a:r>
           </a:p>
         </p:txBody>
@@ -25708,7 +25645,33 @@
                 <a:cs typeface="Instrument Sans"/>
                 <a:sym typeface="Instrument Sans"/>
               </a:rPr>
-              <a:t>交易、事件预测、AI研究、数学、推理、财务、软件工程；5个公开仓库</a:t>
+              <a:t>交易、事件预测、AI研究、数学、推理、财务、</a:t>
+            </a:r>
+          </a:p>
+          <a:p>
+            <a:pPr marL="0" marR="0" lvl="0" indent="0" algn="l" rtl="0">
+              <a:lnSpc>
+                <a:spcPct val="114999"/>
+              </a:lnSpc>
+              <a:spcBef>
+                <a:spcPts val="0"/>
+              </a:spcBef>
+              <a:spcAft>
+                <a:spcPts val="0"/>
+              </a:spcAft>
+              <a:buNone/>
+            </a:pPr>
+            <a:r>
+              <a:rPr lang="zh-CN" sz="1100" b="0" i="0" u="none" strike="noStrike" cap="none">
+                <a:solidFill>
+                  <a:srgbClr val="33322F"/>
+                </a:solidFill>
+                <a:latin typeface="Instrument Sans"/>
+                <a:ea typeface="Instrument Sans"/>
+                <a:cs typeface="Instrument Sans"/>
+                <a:sym typeface="Instrument Sans"/>
+              </a:rPr>
+              <a:t>软件工程；5个公开仓库</a:t>
             </a:r>
           </a:p>
         </p:txBody>
@@ -26219,7 +26182,31 @@
                 <a:cs typeface="Newsreader"/>
                 <a:sym typeface="Newsreader"/>
               </a:rPr>
-              <a:t>$8.5B → $700B</a:t>
+              <a:t>85亿 </a:t>
+            </a:r>
+            <a:r>
+              <a:rPr lang="zh-CN" sz="2400" b="0" i="0" u="none" strike="noStrike" cap="none">
+                <a:solidFill>
+                  <a:srgbClr val="111110"/>
+                </a:solidFill>
+                <a:latin typeface="Instrument Sans"/>
+                <a:ea typeface="Instrument Sans"/>
+                <a:cs typeface="Instrument Sans"/>
+                <a:sym typeface="Instrument Sans"/>
+              </a:rPr>
+              <a:t>→</a:t>
+            </a:r>
+            <a:r>
+              <a:rPr lang="zh-CN" sz="2600" b="0" i="0" u="none" strike="noStrike" cap="none">
+                <a:solidFill>
+                  <a:srgbClr val="111110"/>
+                </a:solidFill>
+                <a:latin typeface="Newsreader"/>
+                <a:ea typeface="Newsreader"/>
+                <a:cs typeface="Newsreader"/>
+                <a:sym typeface="Newsreader"/>
+              </a:rPr>
+              <a:t> 7,000亿美元</a:t>
             </a:r>
           </a:p>
         </p:txBody>
@@ -26271,7 +26258,33 @@
                 <a:cs typeface="Instrument Sans"/>
                 <a:sym typeface="Instrument Sans"/>
               </a:rPr>
-              <a:t>今天实验室每年采购85亿美元训练数据与RL环境；2030年训练市场约7,000亿美元，82倍</a:t>
+              <a:t>今天实验室每年采购85亿美元训练数据与RL环境</a:t>
+            </a:r>
+          </a:p>
+          <a:p>
+            <a:pPr marL="0" marR="0" lvl="0" indent="0" algn="l" rtl="0">
+              <a:lnSpc>
+                <a:spcPct val="114999"/>
+              </a:lnSpc>
+              <a:spcBef>
+                <a:spcPts val="0"/>
+              </a:spcBef>
+              <a:spcAft>
+                <a:spcPts val="0"/>
+              </a:spcAft>
+              <a:buNone/>
+            </a:pPr>
+            <a:r>
+              <a:rPr lang="zh-CN" sz="1100" b="0" i="0" u="none" strike="noStrike" cap="none">
+                <a:solidFill>
+                  <a:srgbClr val="33322F"/>
+                </a:solidFill>
+                <a:latin typeface="Instrument Sans"/>
+                <a:ea typeface="Instrument Sans"/>
+                <a:cs typeface="Instrument Sans"/>
+                <a:sym typeface="Instrument Sans"/>
+              </a:rPr>
+              <a:t>2030年训练市场约7,000亿美元，82倍</a:t>
             </a:r>
           </a:p>
         </p:txBody>
@@ -26450,7 +26463,33 @@
                 <a:cs typeface="Instrument Sans"/>
                 <a:sym typeface="Instrument Sans"/>
               </a:rPr>
-              <a:t>人民币4,000万元（等值美元），投后估值5亿元；商业交付与RSI研发各2,000万元</a:t>
+              <a:t>人民币，等值美元投资；投后估值5亿元</a:t>
+            </a:r>
+          </a:p>
+          <a:p>
+            <a:pPr marL="0" marR="0" lvl="0" indent="0" algn="l" rtl="0">
+              <a:lnSpc>
+                <a:spcPct val="114999"/>
+              </a:lnSpc>
+              <a:spcBef>
+                <a:spcPts val="0"/>
+              </a:spcBef>
+              <a:spcAft>
+                <a:spcPts val="0"/>
+              </a:spcAft>
+              <a:buNone/>
+            </a:pPr>
+            <a:r>
+              <a:rPr lang="zh-CN" sz="1100" b="0" i="0" u="none" strike="noStrike" cap="none">
+                <a:solidFill>
+                  <a:srgbClr val="33322F"/>
+                </a:solidFill>
+                <a:latin typeface="Instrument Sans"/>
+                <a:ea typeface="Instrument Sans"/>
+                <a:cs typeface="Instrument Sans"/>
+                <a:sym typeface="Instrument Sans"/>
+              </a:rPr>
+              <a:t>商业交付与RSI研发各2,000万元</a:t>
             </a:r>
           </a:p>
         </p:txBody>
@@ -26490,7 +26529,7 @@
               <a:buNone/>
             </a:pPr>
             <a:r>
-              <a:rPr lang="zh-CN" sz="1700" b="0" i="0" u="none" strike="noStrike" cap="none">
+              <a:rPr lang="zh-CN" sz="1600" b="0" i="0" u="none" strike="noStrike" cap="none">
                 <a:solidFill>
                   <a:srgbClr val="111110"/>
                 </a:solidFill>
@@ -26499,10 +26538,10 @@
                 <a:cs typeface="Newsreader"/>
                 <a:sym typeface="Newsreader"/>
               </a:rPr>
-              <a:t>谁有最好的训练世界，谁就有该行业最好的AI；</a:t>
-            </a:r>
-            <a:r>
-              <a:rPr lang="zh-CN" sz="1700" b="0" i="0" u="none" strike="noStrike" cap="none">
+              <a:t>谁有一个行业最好的训练世界，谁就有这个行业最好的AI；</a:t>
+            </a:r>
+            <a:r>
+              <a:rPr lang="zh-CN" sz="1600" b="0" i="0" u="none" strike="noStrike" cap="none">
                 <a:solidFill>
                   <a:srgbClr val="C2410C"/>
                 </a:solidFill>
@@ -28116,7 +28155,7 @@
                 <a:cs typeface="Instrument Sans"/>
                 <a:sym typeface="Instrument Sans"/>
               </a:rPr>
-              <a:t>A轮2.5亿美元（2024年9月）到C轮100亿美元（2025年10月）；200亿美元估值轮次处于早期洽谈（彭博，2026年7月9日）</a:t>
+              <a:t>A轮2.5亿美元（2024年9月）、B轮20亿美元（2025年2月）到C轮100亿美元（2025年10月）；200亿美元估值轮次处于早期洽谈（彭博，2026年7月9日）</a:t>
             </a:r>
           </a:p>
           <a:p>
@@ -28230,7 +28269,7 @@
                 <a:cs typeface="Instrument Sans"/>
                 <a:sym typeface="Instrument Sans"/>
               </a:rPr>
-              <a:t>福布斯，2026年9月1日（加入YC 18个月，估值32亿美元）；Business Wire（2026年4月，A轮估值3亿美元，年化收入1亿美元）</a:t>
+              <a:t>2025年2月成立；福布斯，2026年9月1日（加入YC 18个月，估值32亿美元）；Business Wire（2026年4月，A轮估值3亿美元，年化收入1亿美元）；YC公司页（联合创始人曾在Citadel Securities实习）</a:t>
             </a:r>
           </a:p>
           <a:p>
@@ -28268,7 +28307,7 @@
                 <a:cs typeface="Instrument Sans"/>
                 <a:sym typeface="Instrument Sans"/>
               </a:rPr>
-              <a:t>2016年由19岁的Alexandr Wang创立（福布斯）；Meta以143亿美元取得49%股份，估值约290亿美元（路透社，2025年6月）</a:t>
+              <a:t>2016年由19岁的Alexandr Wang创立（福布斯）；Meta以143亿美元取得49%股份，估值约290亿美元（路透社，2025年6月）；近一半新训练项目涉及RL环境（Scale AI博客，2026年2月）</a:t>
             </a:r>
           </a:p>
           <a:p>
@@ -28306,7 +28345,7 @@
                 <a:cs typeface="Instrument Sans"/>
                 <a:sym typeface="Instrument Sans"/>
               </a:rPr>
-              <a:t>彭博，2026年9月10日（阿里领投3亿美元，估值25亿美元，腾讯、HSG跟投；阿里、字节、DeepSeek等向UniPat与Humanlaya采购）</a:t>
+              <a:t>彭博，2026年9月10日（阿里领投3亿美元，据报道估值25亿美元，腾讯、红杉中国跟投；条款可能变化；阿里、字节、DeepSeek等向UniPat与Humanlaya采购）</a:t>
             </a:r>
           </a:p>
           <a:p>
@@ -28562,7 +28601,22 @@
                 <a:cs typeface="Instrument Sans"/>
                 <a:sym typeface="Instrument Sans"/>
               </a:rPr>
-              <a:t>2030年AI经济 × 10%；10%参照大型科技公司研发占收入约10–15%，取下限，为推算假设</a:t>
+              <a:t>2030年AI经济 × 10%；</a:t>
+            </a:r>
+            <a:br>
+              <a:rPr lang="zh-CN" sz="900"/>
+            </a:br>
+            <a:r>
+              <a:rPr lang="zh-CN" sz="900" b="0" i="0" u="none" strike="noStrike" cap="none">
+                <a:solidFill>
+                  <a:srgbClr val="33322F"/>
+                </a:solidFill>
+                <a:latin typeface="Instrument Sans"/>
+                <a:ea typeface="Instrument Sans"/>
+                <a:cs typeface="Instrument Sans"/>
+                <a:sym typeface="Instrument Sans"/>
+              </a:rPr>
+              <a:t>10%参照大型科技公司研发占收入约10–15%，取下限，为推算假设</a:t>
             </a:r>
           </a:p>
           <a:p>
@@ -29210,7 +29264,7 @@
                 <a:cs typeface="Instrument Sans"/>
                 <a:sym typeface="Instrument Sans"/>
               </a:rPr>
-              <a:t>让AI反复做真实工作、并从结果中学习的系统，常称RL环境</a:t>
+              <a:t>让AI反复做真实工作、从结果中学习的系统，即RL环境</a:t>
             </a:r>
           </a:p>
         </p:txBody>
@@ -29389,7 +29443,22 @@
                 <a:cs typeface="Instrument Sans"/>
                 <a:sym typeface="Instrument Sans"/>
               </a:rPr>
-              <a:t>世界对AI动作的反应：盈亏、账目、代码能否运行、事件是否发生</a:t>
+              <a:t>世界对AI动作的反应：</a:t>
+            </a:r>
+            <a:br>
+              <a:rPr lang="zh-CN" sz="1100"/>
+            </a:br>
+            <a:r>
+              <a:rPr lang="zh-CN" sz="1100" b="0" i="0" u="none" strike="noStrike" cap="none">
+                <a:solidFill>
+                  <a:srgbClr val="33322F"/>
+                </a:solidFill>
+                <a:latin typeface="Instrument Sans"/>
+                <a:ea typeface="Instrument Sans"/>
+                <a:cs typeface="Instrument Sans"/>
+                <a:sym typeface="Instrument Sans"/>
+              </a:rPr>
+              <a:t>盈亏、账目、代码能否运行、事件是否发生</a:t>
             </a:r>
           </a:p>
         </p:txBody>
@@ -30880,7 +30949,22 @@
                 <a:cs typeface="Instrument Sans"/>
                 <a:sym typeface="Instrument Sans"/>
               </a:rPr>
-              <a:t>United Stables首位员工：U稳定币从0做到14亿美元，一个月上线Binance</a:t>
+              <a:t>United Stables首位员工：U稳定币从0做到</a:t>
+            </a:r>
+            <a:br>
+              <a:rPr lang="zh-CN" sz="1100"/>
+            </a:br>
+            <a:r>
+              <a:rPr lang="zh-CN" sz="1100" b="0" i="0" u="none" strike="noStrike" cap="none">
+                <a:solidFill>
+                  <a:srgbClr val="33322F"/>
+                </a:solidFill>
+                <a:latin typeface="Instrument Sans"/>
+                <a:ea typeface="Instrument Sans"/>
+                <a:cs typeface="Instrument Sans"/>
+                <a:sym typeface="Instrument Sans"/>
+              </a:rPr>
+              <a:t>14亿美元，一个月上线Binance</a:t>
             </a:r>
           </a:p>
           <a:p>
@@ -31155,7 +31239,22 @@
                 <a:cs typeface="Instrument Sans"/>
                 <a:sym typeface="Instrument Sans"/>
               </a:rPr>
-              <a:t>剑桥机器学习暑研，师从统计学教授Po-Ling Loh（国际数理统计学会会士）</a:t>
+              <a:t>剑桥机器学习暑研，师从统计学教授</a:t>
+            </a:r>
+            <a:br>
+              <a:rPr lang="zh-CN" sz="1100"/>
+            </a:br>
+            <a:r>
+              <a:rPr lang="zh-CN" sz="1100" b="0" i="0" u="none" strike="noStrike" cap="none">
+                <a:solidFill>
+                  <a:srgbClr val="33322F"/>
+                </a:solidFill>
+                <a:latin typeface="Instrument Sans"/>
+                <a:ea typeface="Instrument Sans"/>
+                <a:cs typeface="Instrument Sans"/>
+                <a:sym typeface="Instrument Sans"/>
+              </a:rPr>
+              <a:t>Po-Ling Loh（国际数理统计学会会士）</a:t>
             </a:r>
           </a:p>
           <a:p>
@@ -31314,7 +31413,33 @@
                 <a:cs typeface="Instrument Sans"/>
                 <a:sym typeface="Instrument Sans"/>
               </a:rPr>
-              <a:t>剑桥数学一等荣誉（奖学金） · 深国交 · 剑桥数学竞赛全球前30 · 英国物理竞赛超级金奖</a:t>
+              <a:t>剑桥数学一等荣誉（奖学金） · 深国交</a:t>
+            </a:r>
+          </a:p>
+          <a:p>
+            <a:pPr marL="0" marR="0" lvl="0" indent="0" algn="l" rtl="0">
+              <a:lnSpc>
+                <a:spcPct val="112000"/>
+              </a:lnSpc>
+              <a:spcBef>
+                <a:spcPts val="0"/>
+              </a:spcBef>
+              <a:spcAft>
+                <a:spcPts val="0"/>
+              </a:spcAft>
+              <a:buNone/>
+            </a:pPr>
+            <a:r>
+              <a:rPr lang="zh-CN" sz="950" b="0" i="0" u="none" strike="noStrike" cap="none">
+                <a:solidFill>
+                  <a:srgbClr val="6E6C66"/>
+                </a:solidFill>
+                <a:latin typeface="Instrument Sans"/>
+                <a:ea typeface="Instrument Sans"/>
+                <a:cs typeface="Instrument Sans"/>
+                <a:sym typeface="Instrument Sans"/>
+              </a:rPr>
+              <a:t>剑桥数学竞赛全球前30 · 英国物理竞赛超级金奖</a:t>
             </a:r>
           </a:p>
         </p:txBody>
@@ -31638,7 +31763,7 @@
                 <a:cs typeface="Newsreader"/>
                 <a:sym typeface="Newsreader"/>
               </a:rPr>
-              <a:t>Scale AI、Mercor、AfterQuery创始人都在20岁左右起步；首轮投资人回报：</a:t>
+              <a:t>Scale AI、Mercor、AfterQuery创始人都在20岁左右起步；早期投资人回报：</a:t>
             </a:r>
             <a:r>
               <a:rPr lang="zh-CN" sz="1500" b="0" i="0" u="none" strike="noStrike" cap="none">
@@ -32318,7 +32443,7 @@
               <a:buNone/>
             </a:pPr>
             <a:r>
-              <a:rPr lang="zh-CN" sz="1150" b="0" i="0" u="none" strike="noStrike" cap="none">
+              <a:rPr lang="zh-CN" sz="1100" b="0" i="0" u="none" strike="noStrike" cap="none">
                 <a:solidFill>
                   <a:srgbClr val="33322F"/>
                 </a:solidFill>
@@ -32327,7 +32452,7 @@
                 <a:cs typeface="Instrument Sans"/>
                 <a:sym typeface="Instrument Sans"/>
               </a:rPr>
-              <a:t>Mercor年化毛营收：16个月，7,500万 → 20亿美元</a:t>
+              <a:t>Mercor年化毛营收：16个月，7,500万→20亿美元</a:t>
             </a:r>
           </a:p>
         </p:txBody>
@@ -32405,7 +32530,7 @@
                 <a:cs typeface="IBM Plex Mono"/>
                 <a:sym typeface="IBM Plex Mono"/>
               </a:rPr>
-              <a:t>融资速度</a:t>
+              <a:t>估值增长</a:t>
             </a:r>
           </a:p>
         </p:txBody>
@@ -32497,7 +32622,7 @@
               <a:buNone/>
             </a:pPr>
             <a:r>
-              <a:rPr lang="zh-CN" sz="1150" b="0" i="0" u="none" strike="noStrike" cap="none">
+              <a:rPr lang="zh-CN" sz="1100" b="0" i="0" u="none" strike="noStrike" cap="none">
                 <a:solidFill>
                   <a:srgbClr val="33322F"/>
                 </a:solidFill>
@@ -32506,7 +32631,7 @@
                 <a:cs typeface="Instrument Sans"/>
                 <a:sym typeface="Instrument Sans"/>
               </a:rPr>
-              <a:t>Mercor估值：18个月，20亿 → 200亿美元（洽谈中）</a:t>
+              <a:t>Mercor估值：17个月，20亿→200亿美元（洽谈中）</a:t>
             </a:r>
           </a:p>
         </p:txBody>
@@ -32676,7 +32801,7 @@
               <a:buNone/>
             </a:pPr>
             <a:r>
-              <a:rPr lang="zh-CN" sz="1150" b="0" i="0" u="none" strike="noStrike" cap="none">
+              <a:rPr lang="zh-CN" sz="1100" b="0" i="0" u="none" strike="noStrike" cap="none">
                 <a:solidFill>
                   <a:srgbClr val="33322F"/>
                 </a:solidFill>
@@ -32685,7 +32810,7 @@
                 <a:cs typeface="Instrument Sans"/>
                 <a:sym typeface="Instrument Sans"/>
               </a:rPr>
-              <a:t>AI智能体市场：7年，79亿 → 约1,110亿美元</a:t>
+              <a:t>AI智能体市场：7年，79亿→约1,110亿美元</a:t>
             </a:r>
           </a:p>
         </p:txBody>
@@ -32890,7 +33015,7 @@
                 <a:cs typeface="Newsreader"/>
                 <a:sym typeface="Newsreader"/>
               </a:rPr>
-              <a:t>25亿美元</a:t>
+              <a:t>290亿美元</a:t>
             </a:r>
           </a:p>
         </p:txBody>
@@ -32939,7 +33064,7 @@
                 <a:cs typeface="Instrument Sans"/>
                 <a:sym typeface="Instrument Sans"/>
               </a:rPr>
-              <a:t>UniPat估值：阿里领投，腾讯、HSG跟投（2026年9月）</a:t>
+              <a:t>Scale AI估值，Meta以143亿美元入股49%</a:t>
             </a:r>
           </a:p>
         </p:txBody>
@@ -33320,7 +33445,7 @@
                 <a:cs typeface="Instrument Sans"/>
                 <a:sym typeface="Instrument Sans"/>
               </a:rPr>
-              <a:t>AfterQuery估值：3亿 → 32亿美元</a:t>
+              <a:t>AfterQuery估值：3亿→32亿美元</a:t>
             </a:r>
           </a:p>
         </p:txBody>
@@ -33557,7 +33682,7 @@
                 <a:cs typeface="Instrument Sans"/>
                 <a:sym typeface="Instrument Sans"/>
               </a:rPr>
-              <a:t>来源：Mercor（TechCrunch、Sacra、Dealroom、彭博）；AfterQuery（Business Wire、福布斯）；Snorkel AI（公司公告）；UniPat（彭博）；Scale AI（公司博客）；AI智能体（Precedence Research）；文本存量（Epoch AI）。详见A2。</a:t>
+              <a:t>来源：Mercor（TechCrunch、Sacra、Dealroom、彭博）；AfterQuery（Business Wire、福布斯）；Snorkel AI（公司公告）；Scale AI（路透社、公司博客）；AI智能体（Precedence Research）；文本存量（Epoch AI）。详见A2。</a:t>
             </a:r>
           </a:p>
         </p:txBody>
@@ -34055,7 +34180,7 @@
                 <a:cs typeface="Newsreader"/>
                 <a:sym typeface="Newsreader"/>
               </a:rPr>
-              <a:t>仍可能没有完成真实工作</a:t>
+              <a:t>不等于完成真实工作</a:t>
             </a:r>
           </a:p>
         </p:txBody>
@@ -34104,7 +34229,7 @@
                 <a:cs typeface="Instrument Sans"/>
                 <a:sym typeface="Instrument Sans"/>
               </a:rPr>
-              <a:t>AI会做题了，但真实工作没有标准答案</a:t>
+              <a:t>同样的问题出现在每个行业</a:t>
             </a:r>
           </a:p>
         </p:txBody>
@@ -37503,7 +37628,7 @@
         <p:spPr>
           <a:xfrm>
             <a:off x="548640" y="1783080"/>
-            <a:ext cx="6035040" cy="676656"/>
+            <a:ext cx="6035040" cy="594360"/>
           </a:xfrm>
           <a:prstGeom prst="rect">
             <a:avLst/>
@@ -37532,7 +37657,7 @@
         <p:spPr>
           <a:xfrm>
             <a:off x="777240" y="1783080"/>
-            <a:ext cx="457200" cy="676656"/>
+            <a:ext cx="457200" cy="594360"/>
           </a:xfrm>
           <a:prstGeom prst="rect">
             <a:avLst/>
@@ -37581,7 +37706,7 @@
         <p:spPr>
           <a:xfrm>
             <a:off x="1234440" y="1783080"/>
-            <a:ext cx="1554480" cy="676656"/>
+            <a:ext cx="1554480" cy="594360"/>
           </a:xfrm>
           <a:prstGeom prst="rect">
             <a:avLst/>
@@ -37630,7 +37755,7 @@
         <p:spPr>
           <a:xfrm>
             <a:off x="2834640" y="1783080"/>
-            <a:ext cx="3566160" cy="676656"/>
+            <a:ext cx="3566160" cy="594360"/>
           </a:xfrm>
           <a:prstGeom prst="rect">
             <a:avLst/>
@@ -37678,8 +37803,8 @@
         </p:nvSpPr>
         <p:spPr>
           <a:xfrm>
-            <a:off x="548640" y="2569464"/>
-            <a:ext cx="6035040" cy="676656"/>
+            <a:off x="548640" y="2606040"/>
+            <a:ext cx="6035040" cy="594360"/>
           </a:xfrm>
           <a:prstGeom prst="rect">
             <a:avLst/>
@@ -37707,8 +37832,8 @@
         </p:nvSpPr>
         <p:spPr>
           <a:xfrm>
-            <a:off x="777240" y="2569464"/>
-            <a:ext cx="457200" cy="676656"/>
+            <a:off x="777240" y="2606040"/>
+            <a:ext cx="457200" cy="594360"/>
           </a:xfrm>
           <a:prstGeom prst="rect">
             <a:avLst/>
@@ -37756,8 +37881,8 @@
         </p:nvSpPr>
         <p:spPr>
           <a:xfrm>
-            <a:off x="1234440" y="2569464"/>
-            <a:ext cx="1554480" cy="676656"/>
+            <a:off x="1234440" y="2606040"/>
+            <a:ext cx="1554480" cy="594360"/>
           </a:xfrm>
           <a:prstGeom prst="rect">
             <a:avLst/>
@@ -37805,8 +37930,8 @@
         </p:nvSpPr>
         <p:spPr>
           <a:xfrm>
-            <a:off x="2834640" y="2569464"/>
-            <a:ext cx="3566160" cy="676656"/>
+            <a:off x="2834640" y="2606040"/>
+            <a:ext cx="3566160" cy="594360"/>
           </a:xfrm>
           <a:prstGeom prst="rect">
             <a:avLst/>
@@ -37854,8 +37979,8 @@
         </p:nvSpPr>
         <p:spPr>
           <a:xfrm>
-            <a:off x="548640" y="3355848"/>
-            <a:ext cx="6035040" cy="676656"/>
+            <a:off x="548640" y="3429000"/>
+            <a:ext cx="6035040" cy="594360"/>
           </a:xfrm>
           <a:prstGeom prst="rect">
             <a:avLst/>
@@ -37883,8 +38008,8 @@
         </p:nvSpPr>
         <p:spPr>
           <a:xfrm>
-            <a:off x="777240" y="3355848"/>
-            <a:ext cx="457200" cy="676656"/>
+            <a:off x="777240" y="3429000"/>
+            <a:ext cx="457200" cy="594360"/>
           </a:xfrm>
           <a:prstGeom prst="rect">
             <a:avLst/>
@@ -37932,8 +38057,8 @@
         </p:nvSpPr>
         <p:spPr>
           <a:xfrm>
-            <a:off x="1234440" y="3355848"/>
-            <a:ext cx="1554480" cy="676656"/>
+            <a:off x="1234440" y="3429000"/>
+            <a:ext cx="1554480" cy="594360"/>
           </a:xfrm>
           <a:prstGeom prst="rect">
             <a:avLst/>
@@ -37981,8 +38106,8 @@
         </p:nvSpPr>
         <p:spPr>
           <a:xfrm>
-            <a:off x="2834640" y="3355848"/>
-            <a:ext cx="3566160" cy="676656"/>
+            <a:off x="2834640" y="3429000"/>
+            <a:ext cx="3566160" cy="594360"/>
           </a:xfrm>
           <a:prstGeom prst="rect">
             <a:avLst/>
@@ -38030,8 +38155,8 @@
         </p:nvSpPr>
         <p:spPr>
           <a:xfrm>
-            <a:off x="548640" y="4169664"/>
-            <a:ext cx="6035040" cy="676656"/>
+            <a:off x="548640" y="4251960"/>
+            <a:ext cx="6035040" cy="594360"/>
           </a:xfrm>
           <a:prstGeom prst="rect">
             <a:avLst/>
@@ -38059,8 +38184,8 @@
         </p:nvSpPr>
         <p:spPr>
           <a:xfrm>
-            <a:off x="777240" y="4169664"/>
-            <a:ext cx="1097280" cy="676656"/>
+            <a:off x="777240" y="4251960"/>
+            <a:ext cx="2011680" cy="594360"/>
           </a:xfrm>
           <a:prstGeom prst="rect">
             <a:avLst/>
@@ -38108,8 +38233,8 @@
         </p:nvSpPr>
         <p:spPr>
           <a:xfrm>
-            <a:off x="1920240" y="4169664"/>
-            <a:ext cx="4480560" cy="676656"/>
+            <a:off x="2834640" y="4251960"/>
+            <a:ext cx="3566160" cy="594360"/>
           </a:xfrm>
           <a:prstGeom prst="rect">
             <a:avLst/>
@@ -39685,7 +39810,22 @@
                 <a:cs typeface="Instrument Sans"/>
                 <a:sym typeface="Instrument Sans"/>
               </a:rPr>
-              <a:t>开源模型Qwen3.8-27B训练后，在未见过的真实行情上交易表现最高提升12%</a:t>
+              <a:t>开源模型Qwen3.8-27B训练后，</a:t>
+            </a:r>
+            <a:br>
+              <a:rPr lang="zh-CN" sz="1250"/>
+            </a:br>
+            <a:r>
+              <a:rPr lang="zh-CN" sz="1250" b="0" i="0" u="none" strike="noStrike" cap="none">
+                <a:solidFill>
+                  <a:srgbClr val="111110"/>
+                </a:solidFill>
+                <a:latin typeface="Instrument Sans"/>
+                <a:ea typeface="Instrument Sans"/>
+                <a:cs typeface="Instrument Sans"/>
+                <a:sym typeface="Instrument Sans"/>
+              </a:rPr>
+              <a:t>在未见过的真实行情上交易表现最高提升12%</a:t>
             </a:r>
           </a:p>
           <a:p>
@@ -39852,7 +39992,7 @@
         <p:spPr>
           <a:xfrm>
             <a:off x="6812280" y="1517904"/>
-            <a:ext cx="4828032" cy="3566160"/>
+            <a:ext cx="4828032" cy="3364992"/>
           </a:xfrm>
           <a:prstGeom prst="rect">
             <a:avLst/>
@@ -39916,7 +40056,7 @@
                 <a:cs typeface="IBM Plex Mono"/>
                 <a:sym typeface="IBM Plex Mono"/>
               </a:rPr>
-              <a:t>Xitadel公开预览版 · 满分100</a:t>
+              <a:t>Xitadel公开预览版</a:t>
             </a:r>
           </a:p>
         </p:txBody>
@@ -39978,7 +40118,7 @@
         </p:nvSpPr>
         <p:spPr>
           <a:xfrm>
-            <a:off x="10588752" y="2523744"/>
+            <a:off x="10588752" y="2660904"/>
             <a:ext cx="13716" cy="1773936"/>
           </a:xfrm>
           <a:prstGeom prst="rect">
@@ -40007,7 +40147,7 @@
         </p:nvSpPr>
         <p:spPr>
           <a:xfrm>
-            <a:off x="9674352" y="2322576"/>
+            <a:off x="9857232" y="2441448"/>
             <a:ext cx="1463040" cy="182880"/>
           </a:xfrm>
           <a:prstGeom prst="rect">
@@ -40056,7 +40196,7 @@
         </p:nvSpPr>
         <p:spPr>
           <a:xfrm>
-            <a:off x="7086600" y="2706624"/>
+            <a:off x="7086600" y="2843784"/>
             <a:ext cx="1234440" cy="292608"/>
           </a:xfrm>
           <a:prstGeom prst="rect">
@@ -40105,7 +40245,7 @@
         </p:nvSpPr>
         <p:spPr>
           <a:xfrm>
-            <a:off x="8321040" y="2752344"/>
+            <a:off x="8321040" y="2889504"/>
             <a:ext cx="2190610" cy="201168"/>
           </a:xfrm>
           <a:prstGeom prst="rect">
@@ -40134,8 +40274,8 @@
         </p:nvSpPr>
         <p:spPr>
           <a:xfrm>
-            <a:off x="10566514" y="2706624"/>
-            <a:ext cx="640080" cy="292608"/>
+            <a:off x="9908146" y="2843784"/>
+            <a:ext cx="548640" cy="292608"/>
           </a:xfrm>
           <a:prstGeom prst="rect">
             <a:avLst/>
@@ -40151,7 +40291,7 @@
           </a:bodyPr>
           <a:lstStyle/>
           <a:p>
-            <a:pPr marL="0" marR="0" lvl="0" indent="0" algn="l" rtl="0">
+            <a:pPr marL="0" marR="0" lvl="0" indent="0" algn="r" rtl="0">
               <a:spcBef>
                 <a:spcPts val="0"/>
               </a:spcBef>
@@ -40163,7 +40303,7 @@
             <a:r>
               <a:rPr lang="zh-CN" sz="1000" b="0" i="0" u="none" strike="noStrike" cap="none">
                 <a:solidFill>
-                  <a:srgbClr val="111110"/>
+                  <a:srgbClr val="FAF9F6"/>
                 </a:solidFill>
                 <a:latin typeface="IBM Plex Mono"/>
                 <a:ea typeface="IBM Plex Mono"/>
@@ -40183,7 +40323,7 @@
         </p:nvSpPr>
         <p:spPr>
           <a:xfrm>
-            <a:off x="7086600" y="3127248"/>
+            <a:off x="7086600" y="3264408"/>
             <a:ext cx="1234440" cy="292608"/>
           </a:xfrm>
           <a:prstGeom prst="rect">
@@ -40232,7 +40372,7 @@
         </p:nvSpPr>
         <p:spPr>
           <a:xfrm>
-            <a:off x="8321040" y="3172968"/>
+            <a:off x="8321040" y="3310128"/>
             <a:ext cx="853794" cy="201168"/>
           </a:xfrm>
           <a:prstGeom prst="rect">
@@ -40261,7 +40401,7 @@
         </p:nvSpPr>
         <p:spPr>
           <a:xfrm>
-            <a:off x="9229698" y="3127248"/>
+            <a:off x="9229698" y="3264408"/>
             <a:ext cx="640080" cy="292608"/>
           </a:xfrm>
           <a:prstGeom prst="rect">
@@ -40310,7 +40450,7 @@
         </p:nvSpPr>
         <p:spPr>
           <a:xfrm>
-            <a:off x="7086600" y="3547872"/>
+            <a:off x="7086600" y="3685032"/>
             <a:ext cx="1234440" cy="292608"/>
           </a:xfrm>
           <a:prstGeom prst="rect">
@@ -40359,7 +40499,7 @@
         </p:nvSpPr>
         <p:spPr>
           <a:xfrm>
-            <a:off x="8321040" y="3593592"/>
+            <a:off x="8321040" y="3730752"/>
             <a:ext cx="784628" cy="201168"/>
           </a:xfrm>
           <a:prstGeom prst="rect">
@@ -40388,7 +40528,7 @@
         </p:nvSpPr>
         <p:spPr>
           <a:xfrm>
-            <a:off x="9160532" y="3547872"/>
+            <a:off x="9160532" y="3685032"/>
             <a:ext cx="640080" cy="292608"/>
           </a:xfrm>
           <a:prstGeom prst="rect">
@@ -40437,7 +40577,7 @@
         </p:nvSpPr>
         <p:spPr>
           <a:xfrm>
-            <a:off x="7086600" y="3968496"/>
+            <a:off x="7086600" y="4105656"/>
             <a:ext cx="1234440" cy="292608"/>
           </a:xfrm>
           <a:prstGeom prst="rect">
@@ -40486,7 +40626,7 @@
         </p:nvSpPr>
         <p:spPr>
           <a:xfrm>
-            <a:off x="8321040" y="4014216"/>
+            <a:off x="8321040" y="4151376"/>
             <a:ext cx="696755" cy="201168"/>
           </a:xfrm>
           <a:prstGeom prst="rect">
@@ -40515,7 +40655,7 @@
         </p:nvSpPr>
         <p:spPr>
           <a:xfrm>
-            <a:off x="9072659" y="3968496"/>
+            <a:off x="9072659" y="4105656"/>
             <a:ext cx="640080" cy="292608"/>
           </a:xfrm>
           <a:prstGeom prst="rect">
@@ -40564,58 +40704,6 @@
         </p:nvSpPr>
         <p:spPr>
           <a:xfrm>
-            <a:off x="7086600" y="4489704"/>
-            <a:ext cx="4279392" cy="457200"/>
-          </a:xfrm>
-          <a:prstGeom prst="rect">
-            <a:avLst/>
-          </a:prstGeom>
-          <a:noFill/>
-          <a:ln>
-            <a:noFill/>
-          </a:ln>
-        </p:spPr>
-        <p:txBody>
-          <a:bodyPr spcFirstLastPara="1" wrap="square" lIns="0" tIns="0" rIns="0" bIns="0" anchor="t" anchorCtr="0">
-            <a:noAutofit/>
-          </a:bodyPr>
-          <a:lstStyle/>
-          <a:p>
-            <a:pPr marL="0" marR="0" lvl="0" indent="0" algn="l" rtl="0">
-              <a:lnSpc>
-                <a:spcPct val="110000"/>
-              </a:lnSpc>
-              <a:spcBef>
-                <a:spcPts val="0"/>
-              </a:spcBef>
-              <a:spcAft>
-                <a:spcPts val="0"/>
-              </a:spcAft>
-              <a:buNone/>
-            </a:pPr>
-            <a:r>
-              <a:rPr lang="zh-CN" sz="1100" b="0" i="0" u="none" strike="noStrike" cap="none">
-                <a:solidFill>
-                  <a:srgbClr val="33322F"/>
-                </a:solidFill>
-                <a:latin typeface="Instrument Sans"/>
-                <a:ea typeface="Instrument Sans"/>
-                <a:cs typeface="Instrument Sans"/>
-                <a:sym typeface="Instrument Sans"/>
-              </a:rPr>
-              <a:t>国产模型得分不到GPT 6的一半：真实环境训练的空间最大</a:t>
-            </a:r>
-          </a:p>
-        </p:txBody>
-      </p:sp>
-      <p:sp>
-        <p:nvSpPr>
-          <p:cNvPr id="5037" name="SimReal 5037"/>
-          <p:cNvSpPr txBox="1"/>
-          <p:nvPr/>
-        </p:nvSpPr>
-        <p:spPr>
-          <a:xfrm>
             <a:off x="1243584" y="6382512"/>
             <a:ext cx="457200" cy="237744"/>
           </a:xfrm>
@@ -40659,7 +40747,7 @@
       </p:sp>
       <p:sp>
         <p:nvSpPr>
-          <p:cNvPr id="5038" name="SimReal 5038"/>
+          <p:cNvPr id="5037" name="SimReal 5037"/>
           <p:cNvSpPr txBox="1"/>
           <p:nvPr/>
         </p:nvSpPr>
@@ -40708,7 +40796,7 @@
       </p:sp>
       <p:sp>
         <p:nvSpPr>
-          <p:cNvPr id="5039" name="SimReal 5039"/>
+          <p:cNvPr id="5038" name="SimReal 5038"/>
           <p:cNvSpPr txBox="1"/>
           <p:nvPr/>
         </p:nvSpPr>
@@ -41574,7 +41662,19 @@
                 <a:cs typeface="Instrument Sans"/>
                 <a:sym typeface="Instrument Sans"/>
               </a:rPr>
-              <a:t>开源 · 102星标</a:t>
+              <a:t>开源</a:t>
+            </a:r>
+            <a:r>
+              <a:rPr lang="zh-CN" sz="1100" b="0" i="0" u="none" strike="noStrike" cap="none">
+                <a:solidFill>
+                  <a:srgbClr val="6E6C66"/>
+                </a:solidFill>
+                <a:latin typeface="Instrument Sans"/>
+                <a:ea typeface="Instrument Sans"/>
+                <a:cs typeface="Instrument Sans"/>
+                <a:sym typeface="Instrument Sans"/>
+              </a:rPr>
+              <a:t>  ·  102星标</a:t>
             </a:r>
           </a:p>
         </p:txBody>
@@ -41822,7 +41922,19 @@
                 <a:cs typeface="Instrument Sans"/>
                 <a:sym typeface="Instrument Sans"/>
               </a:rPr>
-              <a:t>开源 · 178星标</a:t>
+              <a:t>开源</a:t>
+            </a:r>
+            <a:r>
+              <a:rPr lang="zh-CN" sz="1100" b="0" i="0" u="none" strike="noStrike" cap="none">
+                <a:solidFill>
+                  <a:srgbClr val="6E6C66"/>
+                </a:solidFill>
+                <a:latin typeface="Instrument Sans"/>
+                <a:ea typeface="Instrument Sans"/>
+                <a:cs typeface="Instrument Sans"/>
+                <a:sym typeface="Instrument Sans"/>
+              </a:rPr>
+              <a:t>  ·  178星标</a:t>
             </a:r>
           </a:p>
         </p:txBody>
@@ -42070,7 +42182,19 @@
                 <a:cs typeface="Instrument Sans"/>
                 <a:sym typeface="Instrument Sans"/>
               </a:rPr>
-              <a:t>开源 · 1星标</a:t>
+              <a:t>开源</a:t>
+            </a:r>
+            <a:r>
+              <a:rPr lang="zh-CN" sz="1100" b="0" i="0" u="none" strike="noStrike" cap="none">
+                <a:solidFill>
+                  <a:srgbClr val="6E6C66"/>
+                </a:solidFill>
+                <a:latin typeface="Instrument Sans"/>
+                <a:ea typeface="Instrument Sans"/>
+                <a:cs typeface="Instrument Sans"/>
+                <a:sym typeface="Instrument Sans"/>
+              </a:rPr>
+              <a:t>  ·  1星标</a:t>
             </a:r>
           </a:p>
         </p:txBody>
@@ -42318,7 +42442,19 @@
                 <a:cs typeface="Instrument Sans"/>
                 <a:sym typeface="Instrument Sans"/>
               </a:rPr>
-              <a:t>开源 · 102星标</a:t>
+              <a:t>开源</a:t>
+            </a:r>
+            <a:r>
+              <a:rPr lang="zh-CN" sz="1100" b="0" i="0" u="none" strike="noStrike" cap="none">
+                <a:solidFill>
+                  <a:srgbClr val="6E6C66"/>
+                </a:solidFill>
+                <a:latin typeface="Instrument Sans"/>
+                <a:ea typeface="Instrument Sans"/>
+                <a:cs typeface="Instrument Sans"/>
+                <a:sym typeface="Instrument Sans"/>
+              </a:rPr>
+              <a:t>  ·  102星标</a:t>
             </a:r>
           </a:p>
         </p:txBody>
@@ -42566,7 +42702,19 @@
                 <a:cs typeface="Instrument Sans"/>
                 <a:sym typeface="Instrument Sans"/>
               </a:rPr>
-              <a:t>开源 · 17星标</a:t>
+              <a:t>开源</a:t>
+            </a:r>
+            <a:r>
+              <a:rPr lang="zh-CN" sz="1100" b="0" i="0" u="none" strike="noStrike" cap="none">
+                <a:solidFill>
+                  <a:srgbClr val="6E6C66"/>
+                </a:solidFill>
+                <a:latin typeface="Instrument Sans"/>
+                <a:ea typeface="Instrument Sans"/>
+                <a:cs typeface="Instrument Sans"/>
+                <a:sym typeface="Instrument Sans"/>
+              </a:rPr>
+              <a:t>  ·  17星标</a:t>
             </a:r>
           </a:p>
         </p:txBody>
@@ -42791,7 +42939,7 @@
                 <a:cs typeface="Instrument Sans"/>
                 <a:sym typeface="Instrument Sans"/>
               </a:rPr>
-              <a:t>已上线 · 非公开</a:t>
+              <a:t>已上线  ·  非公开</a:t>
             </a:r>
           </a:p>
         </p:txBody>
@@ -43016,7 +43164,7 @@
                 <a:cs typeface="Instrument Sans"/>
                 <a:sym typeface="Instrument Sans"/>
               </a:rPr>
-              <a:t>已上线 · 非公开</a:t>
+              <a:t>已上线  ·  非公开</a:t>
             </a:r>
           </a:p>
         </p:txBody>
@@ -43094,7 +43242,7 @@
                 <a:cs typeface="Newsreader"/>
                 <a:sym typeface="Newsreader"/>
               </a:rPr>
-              <a:t>14天上线，</a:t>
+              <a:t>以上全部在</a:t>
             </a:r>
             <a:r>
               <a:rPr lang="zh-CN" sz="1800" b="0" i="0" u="none" strike="noStrike" cap="none">
@@ -43118,7 +43266,7 @@
                 <a:cs typeface="Newsreader"/>
                 <a:sym typeface="Newsreader"/>
               </a:rPr>
-              <a:t>。</a:t>
+              <a:t>下完成。</a:t>
             </a:r>
           </a:p>
         </p:txBody>
@@ -43167,7 +43315,7 @@
                 <a:cs typeface="IBM Plex Mono"/>
                 <a:sym typeface="IBM Plex Mono"/>
               </a:rPr>
-              <a:t>5个公开仓库 · 合计400星标 · 2026年9月29日</a:t>
+              <a:t>合计400星标  ·  2026年9月29日</a:t>
             </a:r>
           </a:p>
         </p:txBody>
